--- a/iot-mood-lamp/docs/lesson_3h_student.pptx
+++ b/iot-mood-lamp/docs/lesson_3h_student.pptx
@@ -120,26 +120,26 @@
   <p:extLst>
     <p:ext uri="{521415D9-36F7-43E2-AB2F-B90AF26B5E84}">
       <p14:sectionLst xmlns:p14="http://schemas.microsoft.com/office/powerpoint/2010/main">
-        <p14:section name="시작" id="{887b9681-4d5b-612b-b347-dc7be8f03f18}">
+        <p14:section name="시작" id="{b8ec300d-c439-4111-123b-ab022f3ac72c}">
           <p14:sldIdLst>
             <p14:sldId id="256"/>
           </p14:sldIdLst>
         </p14:section>
-        <p14:section name="소개" id="{3364e517-3330-b066-ad9d-9a2143aff394}">
+        <p14:section name="소개" id="{82a278bf-166b-b565-c599-309fb426af17}">
           <p14:sldIdLst>
             <p14:sldId id="257"/>
             <p14:sldId id="258"/>
             <p14:sldId id="259"/>
           </p14:sldIdLst>
         </p14:section>
-        <p14:section name="배선" id="{41947b29-6f9d-7224-5a91-a53699cc3cc0}">
+        <p14:section name="배선" id="{61a67632-3c86-285d-2889-66682c1475bb}">
           <p14:sldIdLst>
             <p14:sldId id="260"/>
             <p14:sldId id="261"/>
             <p14:sldId id="262"/>
           </p14:sldIdLst>
         </p14:section>
-        <p14:section name="진행" id="{913164de-83c5-71da-6daa-3ddd4e7ce28c}">
+        <p14:section name="진행" id="{28848a0b-1836-15ee-b741-f0faa700e40c}">
           <p14:sldIdLst>
             <p14:sldId id="263"/>
             <p14:sldId id="264"/>
@@ -148,7 +148,7 @@
             <p14:sldId id="267"/>
           </p14:sldIdLst>
         </p14:section>
-        <p14:section name="도움" id="{89169b5e-238e-732c-48cf-aa9a362555bb}">
+        <p14:section name="도움" id="{29546fd5-1292-9aa9-b777-acfa9195806a}">
           <p14:sldIdLst>
             <p14:sldId id="268"/>
             <p14:sldId id="269"/>
@@ -558,7 +558,14 @@
           <a:p>
             <a:r>
               <a:rPr lang="en-US" dirty="0"/>
-              <a:t>학생용 안내. 두 버전(V1 네오픽셀, V2 릴레이 전구)을 같은 다섯 걸음으로 진행한다.</a:t>
+              <a:t>[교사 노트] 수업 전날 끝내 둘 것
+- PC: 모든 PC에 Arduino IDE · ESP32 보드 · 라이브러리 2개(Adafruit NeoPixel, PubSubClient) 설치, 보드 1대 업로드까지 확인
+- V1 스트립: 16구로 자르고 3가닥 선 납땜까지 완료 (학생이 하면 팀당 15분 + 실패)
+- 네트워크: 교실 와이파이가 2.4GHz이고 로그인 페이지가 없는지 확인. 안 되면 선생님 폰 핫스팟
+- 브로커 + 앱: EMQX Cloud Serverless 계정, TOPIC_PREFIX 결정, MQTT판 앱 1개 완성·테스트, 링크 준비 (docs/mqtt.md)
+- 코드: 와이파이·브로커 값을 채운 step5_app_mqtt 파일 배포 (학생은 TEAM_ID 한 줄만). TEAM01~10 스티커를 보드·폰에
+- 완성 보드 1대: 시연용이자 막힌 팀이 눈으로 비교할 기준. 예비 보드 2대 권장
+핵심 원칙: 시간을 먹는 것은 코딩이 아니라 설치·납땜·앱 만들기. 이 셋을 수업 밖으로 빼면 3시간이면 충분하다.</a:t>
             </a:r>
             <a:endParaRPr lang="en-US" dirty="0"/>
           </a:p>
@@ -646,7 +653,12 @@
           <a:p>
             <a:r>
               <a:rPr lang="en-US" dirty="0"/>
-              <a:t/>
+              <a:t>[교사 노트] V2 릴레이 코드 배경
+- KY-019형은 HIGH 트리거 → RELAY_ACTIVE_LOW = false. LOW에서 켜지는 모듈이면 true.
+- 부팅 순간 전구가 깜빡이지 않게 pinMode보다 먼저 '꺼짐' 값을 써 둔다. 리셋 버튼 테스트는 이것을 확인하는 절차.
+- 220V 없이 릴레이만 꽂고 테스트한다. '딸깍' 소리 + 모듈 LED로 충분히 확인된다.
+- 시리얼 명령: 1(켜기) · 0(끄기) · t(토글) · blink(3번). on/off도 된다.
+- 쉬는 시간에 220V를 연결한 뒤 ④에서 실제 점등 확인. 연결 전에는 보드 전원을 뺀다.</a:t>
             </a:r>
             <a:endParaRPr lang="en-US" dirty="0"/>
           </a:p>
@@ -734,7 +746,13 @@
           <a:p>
             <a:r>
               <a:rPr lang="en-US" dirty="0"/>
-              <a:t/>
+              <a:t>[교사 노트] 자동 동작 규칙의 이유 (step3 README)
+- DARK_MARGIN 5%: 켜짐 기준(DARK_LEVEL)과 꺼짐 기준(DARK_LEVEL + 5%)을 띄워, 경계에서 릴레이가 딸깍거리거나 네오픽셀이 깜빡이지 않게.
+- AUTO_OFF_MS 5분: 움직임이 없으면 꺼짐. 수업 중 확인은 ⑤ 앱의 자동화 탭이나 CONFIG 명령으로 짧게 바꿔 보여줄 수 있다.
+- USE_PIR = false면 조도만으로 켜고 끈다. DARK_LEVEL = 100이면 항상 '어두움'이라 PIR만으로 켜진다.
+- delay() 없이 millis()로 돌아가는 논블로킹 구조라 ⑤에서 통신을 얹어도 멈추지 않는다.
+- 자기 빛 문제: 조도센서가 자기 조명 빛을 보면 켜짐→밝아짐→꺼짐→어두움→켜짐을 반복한다. 시리얼 sensor 명령으로 값을 보며 센서를 돌리거나 가린다.
+- 파일: V1 step3_auto_mood_lamp, V2 step3_auto_lamp. 둘 다 와이파이 없이 동작.</a:t>
             </a:r>
             <a:endParaRPr lang="en-US" dirty="0"/>
           </a:p>
@@ -822,7 +840,13 @@
           <a:p>
             <a:r>
               <a:rPr lang="en-US" dirty="0"/>
-              <a:t/>
+              <a:t>[교사 노트] ⑤ 준비는 전부 교사 몫 (docs/mqtt.md)
+- 배포 파일(step5_app_mqtt)에 미리 채울 값: WIFI_SSID · WIFI_PASS · MQTT_HOST · MQTT_PORT 8883 · MQTT_USER · MQTT_PASS · TOPIC_PREFIX. 학생은 TEAM_ID 한 줄만.
+- 브로커: EMQX Cloud Serverless(무료 할당 안). 보드는 TLS 8883, 앱은 WSS 8084. 브로커 주소·계정은 저장소에 올리지 말고 수업에서 직접 나눠 준다.
+- 확인: 브로커 웹 클라이언트에서 TOPIC_PREFIX/# 를 구독해 두면 보드를 켤 때 …/TEAMnn/status = online 과 state JSON이 보인다. 안 보이면 와이파이(2.4GHz·로그인 페이지·8883 포트) 문제.
+- 앱은 교사가 만든 링크 하나. 설정 탭에서 팀을 고르면 그 팀 토픽으로 명령이 간다. 팀 번호가 겹치면 두 보드가 같이 켜진다.
+- 명령: ON · OFF · AUTO · COLOR &lt;색&gt; · BRIGHT &lt;0~100&gt; · CONFIG &lt;어두움&gt; &lt;초&gt;. V2는 COLOR·BRIGHT를 무시한다. 음성 규칙은 docs/voice_control.md.
+- 반응은 0.1~0.5초. 느리거나 끊기면 거의 다 교실 와이파이.</a:t>
             </a:r>
             <a:endParaRPr lang="en-US" dirty="0"/>
           </a:p>
@@ -910,7 +934,11 @@
           <a:p>
             <a:r>
               <a:rPr lang="en-US" dirty="0"/>
-              <a:t/>
+              <a:t>[교사 노트] 순회할 때
+- 학생이 30초 체크를 먼저 돌리게 하고, 손을 들면 체크 결과부터 묻는다. 대부분 전원·점퍼(V1 SEL, EXT PWR)와 DARK_IS_HIGH 방향에서 끝난다.
+- 완성 보드 1대를 교탁에 켜 두면 막힌 팀이 배선을 눈으로 비교할 수 있다.
+- 손절 기준(4쪽 노트): 0:45 배선 → 예비 보드 교체, 2:20 앱 → ④로 발표, 와이파이 불통 → 교사 시연.
+- 연기·탄 냄새·뜨거움은 즉시 전원 제거. V2의 220V 쪽은 학생이 만지지 않았는지 먼저 확인.</a:t>
             </a:r>
             <a:endParaRPr lang="en-US" dirty="0"/>
           </a:p>
@@ -998,7 +1026,11 @@
           <a:p>
             <a:r>
               <a:rPr lang="en-US" dirty="0"/>
-              <a:t/>
+              <a:t>[교사 노트] 발표와 정리
+- 팀마다 색 하나(V2는 켜 둔 상태)를 정해 켜 두고, 되는 것만 보여준다. 안 되는 것을 설명하는 시간은 두지 않는다.
+- 시간이 남는 팀 과제(코드 수정 없이): c FF8800 같은 6자리 색 코드, 앱 자동화 탭에서 어두움 기준·꺼지는 시간 바꿔 저장, PIR 유지시간 다이얼로 '사람 없음' 시간 체감.
+- 다음 시간 후보: V2 릴레이 전구를 전 팀으로 확장(220V는 교사), 4단계 구글시트 기록으로 '누가 언제 켰나' 데이터 보기.
+- 정리: 충전기를 먼저 빼고 보드에서 선을 뺀다. V2는 교사가 220V를 먼저 분리한다.</a:t>
             </a:r>
             <a:endParaRPr lang="en-US" dirty="0"/>
           </a:p>
@@ -1086,7 +1118,10 @@
           <a:p>
             <a:r>
               <a:rPr lang="en-US" dirty="0"/>
-              <a:t/>
+              <a:t>[교사 노트] 팀 배정은 수업 전에
+- V2(릴레이 전구)는 220V 배선이 교사 작업으로 들어가 팀당 시간이 두 배. 10팀이면 V2는 1~2팀만 두거나, V2는 교사 시연 1대로 돌리는 편이 안전하다.
+- 두 버전은 보드·센서·1단계 코드가 완전히 같다. 다른 것은 출력 부품(네오픽셀 ↔ 릴레이)과 출력 코드뿐.
+- 부품 확인: Wemos D1 R32 + 센서쉴드 V5, HC-SR501 PIR, 조도 모듈(AO 출력), 암-암 점퍼선. V1은 WS2812B RGB 16구 + 2포트 충전기, V2는 KY-019 릴레이 + 5V 1A 충전기 + 램프.</a:t>
             </a:r>
             <a:endParaRPr lang="en-US" dirty="0"/>
           </a:p>
@@ -1174,7 +1209,11 @@
           <a:p>
             <a:r>
               <a:rPr lang="en-US" dirty="0"/>
-              <a:t/>
+              <a:t>[교사 노트] 걸음 운영
+- 성공 기준을 통과한 팀만 다음 걸음으로. 기준은 학생이 스스로 판단할 수 있는 것으로 두었다.
+- ②센서와 ③출력은 서로 독립이라, 느린 팀은 ③을 건너뛰고 ④자동 무드등으로 가도 된다 (④ 코드에 네오픽셀 점등이 들어 있다).
+- 저장소의 4단계(구글시트 + Apps Script, 1~3초 지연)는 이 수업에서 건너뛰고, 5단계(MQTT, 0.1~0.5초)를 ⑤로 쓴다. 학생이 바꾸는 코드 양은 비슷하고 반응이 빨라 수업 체감이 좋다.
+- 슬라이드 번호 ①~⑤는 저장소 폴더의 step1·2·3·5에 대응한다 (④ = step3, ⑤ = step5).</a:t>
             </a:r>
             <a:endParaRPr lang="en-US" dirty="0"/>
           </a:p>
@@ -1262,7 +1301,12 @@
           <a:p>
             <a:r>
               <a:rPr lang="en-US" dirty="0"/>
-              <a:t/>
+              <a:t>[교사 노트] 미리 정해 둔 손절 기준 — 시간이 되면 망설이지 않는다
+- 0:45 배선이 안 끝난 팀 → 선생님 예비 보드로 교체. 배선은 오늘의 목표가 아니다.
+- 2:20 앱 연결이 안 되는 팀 → ④ 자동 무드등으로 발표. 센서 자동이 핵심 성취이고 와이파이 없이 동작한다.
+- 와이파이가 전체적으로 안 되면 → ⑤는 선생님 보드 1대를 폰 핫스팟으로 시연만 하고 끝낸다.
+- 쉬는 시간(1:25~1:35)에 V2 팀의 220V 전구 배선을 교사가 연결한다. 이때 학생은 보드에서 손을 뗀다.
+- 0:00~0:15 완성품 시연은 '오늘 끝에 이것이 된다'를 보여주는 시간. 길게 설명하지 않는다.</a:t>
             </a:r>
             <a:endParaRPr lang="en-US" dirty="0"/>
           </a:p>
@@ -1350,7 +1394,12 @@
           <a:p>
             <a:r>
               <a:rPr lang="en-US" dirty="0"/>
-              <a:t/>
+              <a:t>[교사 노트] 보드 설명 보충 (docs/board.md)
+- D1 R32는 우노 모양이지만 칩은 ESP32(WROOM-32). 코드의 핀은 GPIO 번호: 실드 6번=GPIO27, 2번=GPIO26, 3번=GPIO25, A3=GPIO34.
+- 피해야 할 핀: GPIO 0·2·12·15(부팅 모드, 실드 A0·8번 자리) · GPIO 1·3(USB 시리얼, 실드 0·1번) · GPIO 34~39(입력 전용, 실드 A2~A5).
+- GPIO34는 ADC1이라 와이파이를 켜도 아날로그를 읽을 수 있다. A0·A1(GPIO2·4)은 와이파이를 켜면 못 읽는다 — 조도센서를 A3에 두는 이유.
+- 조도센서 VCC를 3V3에 두는 이유: 실드 V는 5V라서 그대로 꽂으면 출력이 3.3V를 넘어 ESP32 입력 핀에 무리를 준다.
+- 모듈마다 핀 순서가 다르다. 학생이 '모듈 핀 이름을 보고 S·V·G에 한 가닥씩' 꽂도록 반복해서 말한다.</a:t>
             </a:r>
             <a:endParaRPr lang="en-US" dirty="0"/>
           </a:p>
@@ -1438,7 +1487,13 @@
           <a:p>
             <a:r>
               <a:rPr lang="en-US" dirty="0"/>
-              <a:t/>
+              <a:t>[교사 노트] V1 전원과 흔한 실수 (docs/power.md)
+- 전원: 2포트 USB 충전기 1개 — 2.4A 포트 → USB 전원선(빨강·검정) → 실드 EXT PWR, 1A 포트 → 보드 micro USB. 플러그는 1개.
+- 펌웨어는 MAX_BRIGHTNESS = 128로 네오픽셀을 약 0.5A로 묶는다. 16구는 상한 255까지 올려도 2.4A 포트 안에 들어온다.
+- SEL 점퍼를 꽂은 채 EXT PWR에 전원을 넣으면 보드 전원과 외부 전원이 합선된다. 배선 검사 때 점퍼부터 본다.
+- 업로드 중에는 PC USB만. PC USB와 충전기를 동시에 꽂지 않는다.
+- 가장 흔한 실수: DIN 방향(화살표 반대쪽 끝에 꽂음), 5V와 GND 바꿔 꽂음, 조도센서 VCC를 5V(V)에 꽂음.
+- 소켓의 전구는 빼고 램프의 220V 코드는 분리해 둔다 — 빈 소켓에 220V가 들어오는 일을 원천 차단.</a:t>
             </a:r>
             <a:endParaRPr lang="en-US" dirty="0"/>
           </a:p>
@@ -1526,7 +1581,14 @@
           <a:p>
             <a:r>
               <a:rPr lang="en-US" dirty="0"/>
-              <a:t/>
+              <a:t>[교사 노트] 220V 쪽은 교사가 직접 (v2_relay_bulb/wiring.md)
+- 콘센트 L(활선) 한 가닥만 릴레이 COM–NO로 끊어 잇는다. 중성선(N)은 그대로 소켓으로.
+- NO(평상시 열림) 단자를 쓴다 → 보드가 꺼지거나 리셋되면 전구도 꺼진다.
+- 릴레이 단자(COM·NO)는 케이스나 수축튜브로 완전히 덮어 손이 닿지 않게. KY-019는 포토커플러 절연이 없는 모듈이라 220V 쪽 절연을 더 꼼꼼히.
+- 램프 코드의 중간 스위치는 남겨 둔다 — 비상시 수동으로 끌 수 있게.
+- 전원: 보드 micro USB에 5V 1A 충전기. 릴레이 코일(70~90mA) + PIR + 조도 + ESP32로 충분. 220V와 합쳐 플러그 2개 → 멀티탭 하나.
+- 코드 업로드·테스트 중에는 PC USB만으로 V2 부품이 모두 동작한다. 완성 후 충전기로 바꿀 때 PC와 동시에 꽂지 않는다.
+- 220V 연결은 쉬는 시간에, 보드 전원을 뺀 상태에서 한다.</a:t>
             </a:r>
             <a:endParaRPr lang="en-US" dirty="0"/>
           </a:p>
@@ -1614,7 +1676,12 @@
           <a:p>
             <a:r>
               <a:rPr lang="en-US" dirty="0"/>
-              <a:t/>
+              <a:t>[교사 노트] 센서 테스트에서 자주 나오는 것
+- 이번에 쓰는 조도 모듈은 어두울수록 원시값이 커지는 종류라 DARK_IS_HIGH 기본값이 true다. '가리면 원시값은 올라가고 %는 내려가야' 맞다. 반대면 false.
+- PIR(HC-SR501)은 전원 후 30~60초 안정화. 렌즈가 받침 밖으로 나와 있는지 확인. 모듈 다이얼 두 개: 감도·유지시간(▽ 해제까지 몇 초).
+- 기대값: 교실 불 켬 약 70%, 불 끔 약 15% → DARK_LEVEL 30 근처. 교실마다 다르니 팀이 적은 숫자를 그대로 쓰게 한다.
+- 정한 DARK_LEVEL과 DARK_IS_HIGH를 ④·⑤ 코드 위쪽에 똑같이 적어야 한다. 빠뜨리는 팀이 가장 많다 — 기록표를 사진으로 남기게.
+- 시리얼 모니터는 115200. 글자가 깨지면 속도부터.</a:t>
             </a:r>
             <a:endParaRPr lang="en-US" dirty="0"/>
           </a:p>
@@ -1702,7 +1769,12 @@
           <a:p>
             <a:r>
               <a:rPr lang="en-US" dirty="0"/>
-              <a:t/>
+              <a:t>[교사 노트] V1 네오픽셀 코드 배경
+- step2_neopixel_test는 동작이 확인된 Adafruit strandtest 샘플과 같은 설정(LED_PIN 27, LED_COUNT 16, NEO_GRB + NEO_KHZ800, setBrightness 50). 학생이 이 값을 건드리지 않게 한다.
+- 스트립은 WS2812B RGB(RGBW 아님). RGBW 설정으로 보내면 초록·빨강·파랑·꺼짐이 한 칸씩 멈춰 보인다.
+- 라이브러리: Adafruit NeoPixel (1.15.x). 시리얼 명령: c &lt;색이름|6자리&gt;, rainbow, chase, b 0~255, test, on, off.
+- 아예 안 켜지면 순서대로: EXT PWR 전원 들어오나 → SEL 점퍼 뺐나 → DIN이 화살표 시작 쪽인가 → 6번 S에 꽂았나.
+- 끝쪽 LED만 안 켜지면 LED_COUNT가 실제 개수보다 작거나, 납땜 접촉 불량.</a:t>
             </a:r>
             <a:endParaRPr lang="en-US" dirty="0"/>
           </a:p>
@@ -2466,7 +2538,7 @@
       </p:sp>
       <p:sp>
         <p:nvSpPr>
-          <p:cNvPr id="5" name="Text 0"/>
+          <p:cNvPr id="6" name="Text 0"/>
           <p:cNvSpPr/>
           <p:nvPr>
             <p:ph idx="101" type="body" hasCustomPrompt="1"/>
@@ -2581,7 +2653,7 @@
       </p:sp>
       <p:sp>
         <p:nvSpPr>
-          <p:cNvPr id="3" name="Shape 1"/>
+          <p:cNvPr id="4" name="Shape 1"/>
           <p:cNvSpPr/>
           <p:nvPr/>
         </p:nvSpPr>
@@ -2608,7 +2680,7 @@
       </p:sp>
       <p:sp>
         <p:nvSpPr>
-          <p:cNvPr id="4" name="Text 2"/>
+          <p:cNvPr id="5" name="Text 2"/>
           <p:cNvSpPr txBox="1"/>
           <p:nvPr/>
         </p:nvSpPr>
@@ -2644,7 +2716,7 @@
       </p:sp>
       <p:sp>
         <p:nvSpPr>
-          <p:cNvPr id="5" name="Shape 3"/>
+          <p:cNvPr id="6" name="Shape 3"/>
           <p:cNvSpPr/>
           <p:nvPr/>
         </p:nvSpPr>
@@ -2671,7 +2743,7 @@
       </p:sp>
       <p:sp>
         <p:nvSpPr>
-          <p:cNvPr id="6" name="Text 4"/>
+          <p:cNvPr id="7" name="Text 4"/>
           <p:cNvSpPr txBox="1"/>
           <p:nvPr/>
         </p:nvSpPr>
@@ -2784,7 +2856,7 @@
       </p:sp>
       <p:sp>
         <p:nvSpPr>
-          <p:cNvPr id="7" name="Text 5"/>
+          <p:cNvPr id="8" name="Text 5"/>
           <p:cNvSpPr txBox="1"/>
           <p:nvPr/>
         </p:nvSpPr>
@@ -2820,7 +2892,7 @@
       </p:sp>
       <p:sp>
         <p:nvSpPr>
-          <p:cNvPr id="8" name="Text 6"/>
+          <p:cNvPr id="9" name="Text 6"/>
           <p:cNvSpPr txBox="1"/>
           <p:nvPr/>
         </p:nvSpPr>
@@ -2856,7 +2928,7 @@
       </p:sp>
       <p:sp>
         <p:nvSpPr>
-          <p:cNvPr id="9" name="Text 7"/>
+          <p:cNvPr id="10" name="Text 7"/>
           <p:cNvSpPr txBox="1"/>
           <p:nvPr/>
         </p:nvSpPr>
@@ -2895,7 +2967,7 @@
       </p:sp>
       <p:sp>
         <p:nvSpPr>
-          <p:cNvPr id="10" name="Text 8"/>
+          <p:cNvPr id="11" name="Text 8"/>
           <p:cNvSpPr txBox="1"/>
           <p:nvPr/>
         </p:nvSpPr>
@@ -2931,7 +3003,7 @@
       </p:sp>
       <p:sp>
         <p:nvSpPr>
-          <p:cNvPr id="11" name="Text 9"/>
+          <p:cNvPr id="12" name="Text 9"/>
           <p:cNvSpPr txBox="1"/>
           <p:nvPr/>
         </p:nvSpPr>
@@ -2970,7 +3042,7 @@
       </p:sp>
       <p:sp>
         <p:nvSpPr>
-          <p:cNvPr id="12" name="Text 10"/>
+          <p:cNvPr id="13" name="Text 10"/>
           <p:cNvSpPr txBox="1"/>
           <p:nvPr/>
         </p:nvSpPr>
@@ -3006,7 +3078,7 @@
       </p:sp>
       <p:sp>
         <p:nvSpPr>
-          <p:cNvPr id="13" name="Text 11"/>
+          <p:cNvPr id="14" name="Text 11"/>
           <p:cNvSpPr txBox="1"/>
           <p:nvPr/>
         </p:nvSpPr>
@@ -3045,7 +3117,7 @@
       </p:sp>
       <p:sp>
         <p:nvSpPr>
-          <p:cNvPr id="14" name="Text 12"/>
+          <p:cNvPr id="15" name="Text 12"/>
           <p:cNvSpPr txBox="1"/>
           <p:nvPr/>
         </p:nvSpPr>
@@ -3081,7 +3153,7 @@
       </p:sp>
       <p:sp>
         <p:nvSpPr>
-          <p:cNvPr id="15" name="Text 13"/>
+          <p:cNvPr id="16" name="Text 13"/>
           <p:cNvSpPr txBox="1"/>
           <p:nvPr/>
         </p:nvSpPr>
@@ -3120,7 +3192,7 @@
       </p:sp>
       <p:sp>
         <p:nvSpPr>
-          <p:cNvPr id="16" name="Text 14"/>
+          <p:cNvPr id="17" name="Text 14"/>
           <p:cNvSpPr txBox="1"/>
           <p:nvPr/>
         </p:nvSpPr>
@@ -3156,7 +3228,7 @@
       </p:sp>
       <p:sp>
         <p:nvSpPr>
-          <p:cNvPr id="17" name="Text 15"/>
+          <p:cNvPr id="18" name="Text 15"/>
           <p:cNvSpPr txBox="1"/>
           <p:nvPr/>
         </p:nvSpPr>
@@ -3192,7 +3264,7 @@
       </p:sp>
       <p:sp>
         <p:nvSpPr>
-          <p:cNvPr id="18" name="Shape 16"/>
+          <p:cNvPr id="19" name="Shape 16"/>
           <p:cNvSpPr/>
           <p:nvPr/>
         </p:nvSpPr>
@@ -3219,7 +3291,7 @@
       </p:sp>
       <p:sp>
         <p:nvSpPr>
-          <p:cNvPr id="19" name="Shape 17"/>
+          <p:cNvPr id="20" name="Shape 17"/>
           <p:cNvSpPr/>
           <p:nvPr/>
         </p:nvSpPr>
@@ -3244,7 +3316,7 @@
       </p:sp>
       <p:pic>
         <p:nvPicPr>
-          <p:cNvPr id="20" name="Image 0" descr="preencoded.png">    </p:cNvPr>
+          <p:cNvPr id="21" name="Image 0" descr="preencoded.png">    </p:cNvPr>
           <p:cNvPicPr>
             <a:picLocks noChangeAspect="1"/>
           </p:cNvPicPr>
@@ -3268,7 +3340,7 @@
       </p:pic>
       <p:sp>
         <p:nvSpPr>
-          <p:cNvPr id="21" name="Text 18"/>
+          <p:cNvPr id="22" name="Text 18"/>
           <p:cNvSpPr txBox="1"/>
           <p:nvPr/>
         </p:nvSpPr>
@@ -3304,7 +3376,7 @@
       </p:sp>
       <p:sp>
         <p:nvSpPr>
-          <p:cNvPr id="22" name="Text 19"/>
+          <p:cNvPr id="23" name="Text 19"/>
           <p:cNvSpPr txBox="1"/>
           <p:nvPr/>
         </p:nvSpPr>
@@ -3340,7 +3412,7 @@
       </p:sp>
       <p:sp>
         <p:nvSpPr>
-          <p:cNvPr id="23" name="Shape 20"/>
+          <p:cNvPr id="24" name="Shape 20"/>
           <p:cNvSpPr/>
           <p:nvPr/>
         </p:nvSpPr>
@@ -3367,7 +3439,7 @@
       </p:sp>
       <p:sp>
         <p:nvSpPr>
-          <p:cNvPr id="24" name="Shape 21"/>
+          <p:cNvPr id="25" name="Shape 21"/>
           <p:cNvSpPr/>
           <p:nvPr/>
         </p:nvSpPr>
@@ -3392,7 +3464,7 @@
       </p:sp>
       <p:pic>
         <p:nvPicPr>
-          <p:cNvPr id="25" name="Image 1" descr="preencoded.png">    </p:cNvPr>
+          <p:cNvPr id="26" name="Image 1" descr="preencoded.png">    </p:cNvPr>
           <p:cNvPicPr>
             <a:picLocks noChangeAspect="1"/>
           </p:cNvPicPr>
@@ -3416,7 +3488,7 @@
       </p:pic>
       <p:sp>
         <p:nvSpPr>
-          <p:cNvPr id="26" name="Text 22"/>
+          <p:cNvPr id="27" name="Text 22"/>
           <p:cNvSpPr txBox="1"/>
           <p:nvPr/>
         </p:nvSpPr>
@@ -3452,7 +3524,7 @@
       </p:sp>
       <p:sp>
         <p:nvSpPr>
-          <p:cNvPr id="27" name="Text 23"/>
+          <p:cNvPr id="28" name="Text 23"/>
           <p:cNvSpPr txBox="1"/>
           <p:nvPr/>
         </p:nvSpPr>
@@ -3488,7 +3560,7 @@
       </p:sp>
       <p:sp>
         <p:nvSpPr>
-          <p:cNvPr id="28" name="Shape 24"/>
+          <p:cNvPr id="29" name="Shape 24"/>
           <p:cNvSpPr/>
           <p:nvPr/>
         </p:nvSpPr>
@@ -3515,7 +3587,7 @@
       </p:sp>
       <p:sp>
         <p:nvSpPr>
-          <p:cNvPr id="29" name="Shape 25"/>
+          <p:cNvPr id="30" name="Shape 25"/>
           <p:cNvSpPr/>
           <p:nvPr/>
         </p:nvSpPr>
@@ -3540,7 +3612,7 @@
       </p:sp>
       <p:pic>
         <p:nvPicPr>
-          <p:cNvPr id="30" name="Image 2" descr="preencoded.png">    </p:cNvPr>
+          <p:cNvPr id="31" name="Image 2" descr="preencoded.png">    </p:cNvPr>
           <p:cNvPicPr>
             <a:picLocks noChangeAspect="1"/>
           </p:cNvPicPr>
@@ -3564,7 +3636,7 @@
       </p:pic>
       <p:sp>
         <p:nvSpPr>
-          <p:cNvPr id="31" name="Text 26"/>
+          <p:cNvPr id="32" name="Text 26"/>
           <p:cNvSpPr txBox="1"/>
           <p:nvPr/>
         </p:nvSpPr>
@@ -3600,7 +3672,7 @@
       </p:sp>
       <p:sp>
         <p:nvSpPr>
-          <p:cNvPr id="32" name="Text 27"/>
+          <p:cNvPr id="33" name="Text 27"/>
           <p:cNvSpPr txBox="1"/>
           <p:nvPr/>
         </p:nvSpPr>
@@ -3636,7 +3708,7 @@
       </p:sp>
       <p:sp>
         <p:nvSpPr>
-          <p:cNvPr id="33" name="Shape 28"/>
+          <p:cNvPr id="34" name="Shape 28"/>
           <p:cNvSpPr/>
           <p:nvPr/>
         </p:nvSpPr>
@@ -3663,7 +3735,7 @@
       </p:sp>
       <p:sp>
         <p:nvSpPr>
-          <p:cNvPr id="34" name="Shape 29"/>
+          <p:cNvPr id="35" name="Shape 29"/>
           <p:cNvSpPr/>
           <p:nvPr/>
         </p:nvSpPr>
@@ -3688,7 +3760,7 @@
       </p:sp>
       <p:pic>
         <p:nvPicPr>
-          <p:cNvPr id="35" name="Image 3" descr="preencoded.png">    </p:cNvPr>
+          <p:cNvPr id="36" name="Image 3" descr="preencoded.png">    </p:cNvPr>
           <p:cNvPicPr>
             <a:picLocks noChangeAspect="1"/>
           </p:cNvPicPr>
@@ -3712,7 +3784,7 @@
       </p:pic>
       <p:sp>
         <p:nvSpPr>
-          <p:cNvPr id="36" name="Text 30"/>
+          <p:cNvPr id="37" name="Text 30"/>
           <p:cNvSpPr txBox="1"/>
           <p:nvPr/>
         </p:nvSpPr>
@@ -3748,7 +3820,7 @@
       </p:sp>
       <p:sp>
         <p:nvSpPr>
-          <p:cNvPr id="37" name="Text 31"/>
+          <p:cNvPr id="38" name="Text 31"/>
           <p:cNvSpPr txBox="1"/>
           <p:nvPr/>
         </p:nvSpPr>
@@ -4848,7 +4920,7 @@
       </p:graphicFrame>
       <p:sp>
         <p:nvSpPr>
-          <p:cNvPr id="4" name="Text 1"/>
+          <p:cNvPr id="5" name="Text 1"/>
           <p:cNvSpPr txBox="1"/>
           <p:nvPr/>
         </p:nvSpPr>
@@ -4884,7 +4956,7 @@
       </p:sp>
       <p:sp>
         <p:nvSpPr>
-          <p:cNvPr id="5" name="Shape 2"/>
+          <p:cNvPr id="6" name="Shape 2"/>
           <p:cNvSpPr/>
           <p:nvPr/>
         </p:nvSpPr>
@@ -4911,7 +4983,7 @@
       </p:sp>
       <p:sp>
         <p:nvSpPr>
-          <p:cNvPr id="6" name="Text 3"/>
+          <p:cNvPr id="7" name="Text 3"/>
           <p:cNvSpPr txBox="1"/>
           <p:nvPr/>
         </p:nvSpPr>
@@ -4967,7 +5039,7 @@
       </p:sp>
       <p:sp>
         <p:nvSpPr>
-          <p:cNvPr id="7" name="Shape 4"/>
+          <p:cNvPr id="8" name="Shape 4"/>
           <p:cNvSpPr/>
           <p:nvPr/>
         </p:nvSpPr>
@@ -4992,7 +5064,7 @@
       </p:sp>
       <p:pic>
         <p:nvPicPr>
-          <p:cNvPr id="8" name="Image 0" descr="preencoded.png">    </p:cNvPr>
+          <p:cNvPr id="9" name="Image 0" descr="preencoded.png">    </p:cNvPr>
           <p:cNvPicPr>
             <a:picLocks noChangeAspect="1"/>
           </p:cNvPicPr>
@@ -5016,7 +5088,7 @@
       </p:pic>
       <p:sp>
         <p:nvSpPr>
-          <p:cNvPr id="9" name="Text 5"/>
+          <p:cNvPr id="10" name="Text 5"/>
           <p:cNvSpPr txBox="1"/>
           <p:nvPr/>
         </p:nvSpPr>
@@ -5052,7 +5124,7 @@
       </p:sp>
       <p:sp>
         <p:nvSpPr>
-          <p:cNvPr id="10" name="Text 6"/>
+          <p:cNvPr id="11" name="Text 6"/>
           <p:cNvSpPr txBox="1"/>
           <p:nvPr/>
         </p:nvSpPr>
@@ -5088,7 +5160,7 @@
       </p:sp>
       <p:sp>
         <p:nvSpPr>
-          <p:cNvPr id="11" name="Shape 7"/>
+          <p:cNvPr id="12" name="Shape 7"/>
           <p:cNvSpPr/>
           <p:nvPr/>
         </p:nvSpPr>
@@ -5113,7 +5185,7 @@
       </p:sp>
       <p:pic>
         <p:nvPicPr>
-          <p:cNvPr id="12" name="Image 1" descr="preencoded.png">    </p:cNvPr>
+          <p:cNvPr id="13" name="Image 1" descr="preencoded.png">    </p:cNvPr>
           <p:cNvPicPr>
             <a:picLocks noChangeAspect="1"/>
           </p:cNvPicPr>
@@ -5137,7 +5209,7 @@
       </p:pic>
       <p:sp>
         <p:nvSpPr>
-          <p:cNvPr id="13" name="Text 8"/>
+          <p:cNvPr id="14" name="Text 8"/>
           <p:cNvSpPr txBox="1"/>
           <p:nvPr/>
         </p:nvSpPr>
@@ -5173,7 +5245,7 @@
       </p:sp>
       <p:sp>
         <p:nvSpPr>
-          <p:cNvPr id="14" name="Text 9"/>
+          <p:cNvPr id="15" name="Text 9"/>
           <p:cNvSpPr txBox="1"/>
           <p:nvPr/>
         </p:nvSpPr>
@@ -5209,7 +5281,7 @@
       </p:sp>
       <p:sp>
         <p:nvSpPr>
-          <p:cNvPr id="15" name="Shape 10"/>
+          <p:cNvPr id="16" name="Shape 10"/>
           <p:cNvSpPr/>
           <p:nvPr/>
         </p:nvSpPr>
@@ -5234,7 +5306,7 @@
       </p:sp>
       <p:pic>
         <p:nvPicPr>
-          <p:cNvPr id="16" name="Image 2" descr="preencoded.png">    </p:cNvPr>
+          <p:cNvPr id="17" name="Image 2" descr="preencoded.png">    </p:cNvPr>
           <p:cNvPicPr>
             <a:picLocks noChangeAspect="1"/>
           </p:cNvPicPr>
@@ -5258,7 +5330,7 @@
       </p:pic>
       <p:sp>
         <p:nvSpPr>
-          <p:cNvPr id="17" name="Text 11"/>
+          <p:cNvPr id="18" name="Text 11"/>
           <p:cNvSpPr txBox="1"/>
           <p:nvPr/>
         </p:nvSpPr>
@@ -5294,7 +5366,7 @@
       </p:sp>
       <p:sp>
         <p:nvSpPr>
-          <p:cNvPr id="18" name="Text 12"/>
+          <p:cNvPr id="19" name="Text 12"/>
           <p:cNvSpPr txBox="1"/>
           <p:nvPr/>
         </p:nvSpPr>
@@ -5438,7 +5510,7 @@
       </p:sp>
       <p:pic>
         <p:nvPicPr>
-          <p:cNvPr id="3" name="Image 0" descr="app_design.png">    </p:cNvPr>
+          <p:cNvPr id="4" name="Image 0" descr="app_design.png">    </p:cNvPr>
           <p:cNvPicPr>
             <a:picLocks noChangeAspect="1"/>
           </p:cNvPicPr>
@@ -5462,7 +5534,7 @@
       </p:pic>
       <p:sp>
         <p:nvSpPr>
-          <p:cNvPr id="4" name="Text 1"/>
+          <p:cNvPr id="5" name="Text 1"/>
           <p:cNvSpPr txBox="1"/>
           <p:nvPr/>
         </p:nvSpPr>
@@ -5498,7 +5570,7 @@
       </p:sp>
       <p:sp>
         <p:nvSpPr>
-          <p:cNvPr id="5" name="Shape 2"/>
+          <p:cNvPr id="6" name="Shape 2"/>
           <p:cNvSpPr/>
           <p:nvPr/>
         </p:nvSpPr>
@@ -5525,7 +5597,7 @@
       </p:sp>
       <p:sp>
         <p:nvSpPr>
-          <p:cNvPr id="6" name="Text 3"/>
+          <p:cNvPr id="7" name="Text 3"/>
           <p:cNvSpPr txBox="1"/>
           <p:nvPr/>
         </p:nvSpPr>
@@ -5561,7 +5633,7 @@
       </p:sp>
       <p:sp>
         <p:nvSpPr>
-          <p:cNvPr id="7" name="Text 4"/>
+          <p:cNvPr id="8" name="Text 4"/>
           <p:cNvSpPr txBox="1"/>
           <p:nvPr/>
         </p:nvSpPr>
@@ -5597,7 +5669,7 @@
       </p:sp>
       <p:sp>
         <p:nvSpPr>
-          <p:cNvPr id="8" name="Shape 5"/>
+          <p:cNvPr id="9" name="Shape 5"/>
           <p:cNvSpPr/>
           <p:nvPr/>
         </p:nvSpPr>
@@ -5624,7 +5696,7 @@
       </p:sp>
       <p:sp>
         <p:nvSpPr>
-          <p:cNvPr id="9" name="Text 6"/>
+          <p:cNvPr id="10" name="Text 6"/>
           <p:cNvSpPr txBox="1"/>
           <p:nvPr/>
         </p:nvSpPr>
@@ -5663,7 +5735,7 @@
       </p:sp>
       <p:sp>
         <p:nvSpPr>
-          <p:cNvPr id="10" name="Text 7"/>
+          <p:cNvPr id="11" name="Text 7"/>
           <p:cNvSpPr txBox="1"/>
           <p:nvPr/>
         </p:nvSpPr>
@@ -5699,7 +5771,7 @@
       </p:sp>
       <p:sp>
         <p:nvSpPr>
-          <p:cNvPr id="11" name="Shape 8"/>
+          <p:cNvPr id="12" name="Shape 8"/>
           <p:cNvSpPr/>
           <p:nvPr/>
         </p:nvSpPr>
@@ -5724,7 +5796,7 @@
       </p:sp>
       <p:pic>
         <p:nvPicPr>
-          <p:cNvPr id="12" name="Image 1" descr="preencoded.png">    </p:cNvPr>
+          <p:cNvPr id="13" name="Image 1" descr="preencoded.png">    </p:cNvPr>
           <p:cNvPicPr>
             <a:picLocks noChangeAspect="1"/>
           </p:cNvPicPr>
@@ -5748,7 +5820,7 @@
       </p:pic>
       <p:sp>
         <p:nvSpPr>
-          <p:cNvPr id="13" name="Text 9"/>
+          <p:cNvPr id="14" name="Text 9"/>
           <p:cNvSpPr txBox="1"/>
           <p:nvPr/>
         </p:nvSpPr>
@@ -5784,7 +5856,7 @@
       </p:sp>
       <p:sp>
         <p:nvSpPr>
-          <p:cNvPr id="14" name="Shape 10"/>
+          <p:cNvPr id="15" name="Shape 10"/>
           <p:cNvSpPr/>
           <p:nvPr/>
         </p:nvSpPr>
@@ -5809,7 +5881,7 @@
       </p:sp>
       <p:pic>
         <p:nvPicPr>
-          <p:cNvPr id="15" name="Image 2" descr="preencoded.png">    </p:cNvPr>
+          <p:cNvPr id="16" name="Image 2" descr="preencoded.png">    </p:cNvPr>
           <p:cNvPicPr>
             <a:picLocks noChangeAspect="1"/>
           </p:cNvPicPr>
@@ -5833,7 +5905,7 @@
       </p:pic>
       <p:sp>
         <p:nvSpPr>
-          <p:cNvPr id="16" name="Text 11"/>
+          <p:cNvPr id="17" name="Text 11"/>
           <p:cNvSpPr txBox="1"/>
           <p:nvPr/>
         </p:nvSpPr>
@@ -5869,7 +5941,7 @@
       </p:sp>
       <p:sp>
         <p:nvSpPr>
-          <p:cNvPr id="17" name="Shape 12"/>
+          <p:cNvPr id="18" name="Shape 12"/>
           <p:cNvSpPr/>
           <p:nvPr/>
         </p:nvSpPr>
@@ -5894,7 +5966,7 @@
       </p:sp>
       <p:pic>
         <p:nvPicPr>
-          <p:cNvPr id="18" name="Image 3" descr="preencoded.png">    </p:cNvPr>
+          <p:cNvPr id="19" name="Image 3" descr="preencoded.png">    </p:cNvPr>
           <p:cNvPicPr>
             <a:picLocks noChangeAspect="1"/>
           </p:cNvPicPr>
@@ -5918,7 +5990,7 @@
       </p:pic>
       <p:sp>
         <p:nvSpPr>
-          <p:cNvPr id="19" name="Text 13"/>
+          <p:cNvPr id="20" name="Text 13"/>
           <p:cNvSpPr txBox="1"/>
           <p:nvPr/>
         </p:nvSpPr>
@@ -5954,7 +6026,7 @@
       </p:sp>
       <p:sp>
         <p:nvSpPr>
-          <p:cNvPr id="20" name="Shape 14"/>
+          <p:cNvPr id="21" name="Shape 14"/>
           <p:cNvSpPr/>
           <p:nvPr/>
         </p:nvSpPr>
@@ -5981,7 +6053,7 @@
       </p:sp>
       <p:sp>
         <p:nvSpPr>
-          <p:cNvPr id="21" name="Text 15"/>
+          <p:cNvPr id="22" name="Text 15"/>
           <p:cNvSpPr txBox="1"/>
           <p:nvPr/>
         </p:nvSpPr>
@@ -6017,7 +6089,7 @@
       </p:sp>
       <p:sp>
         <p:nvSpPr>
-          <p:cNvPr id="22" name="Text 16"/>
+          <p:cNvPr id="23" name="Text 16"/>
           <p:cNvSpPr txBox="1"/>
           <p:nvPr/>
         </p:nvSpPr>
@@ -6053,7 +6125,7 @@
       </p:sp>
       <p:sp>
         <p:nvSpPr>
-          <p:cNvPr id="23" name="Shape 17"/>
+          <p:cNvPr id="24" name="Shape 17"/>
           <p:cNvSpPr/>
           <p:nvPr/>
         </p:nvSpPr>
@@ -6080,7 +6152,7 @@
       </p:sp>
       <p:sp>
         <p:nvSpPr>
-          <p:cNvPr id="24" name="Text 18"/>
+          <p:cNvPr id="25" name="Text 18"/>
           <p:cNvSpPr txBox="1"/>
           <p:nvPr/>
         </p:nvSpPr>
@@ -6116,7 +6188,7 @@
       </p:sp>
       <p:sp>
         <p:nvSpPr>
-          <p:cNvPr id="25" name="Text 19"/>
+          <p:cNvPr id="26" name="Text 19"/>
           <p:cNvSpPr txBox="1"/>
           <p:nvPr/>
         </p:nvSpPr>
@@ -6260,7 +6332,7 @@
       </p:sp>
       <p:sp>
         <p:nvSpPr>
-          <p:cNvPr id="3" name="Shape 1"/>
+          <p:cNvPr id="4" name="Shape 1"/>
           <p:cNvSpPr/>
           <p:nvPr/>
         </p:nvSpPr>
@@ -6287,7 +6359,7 @@
       </p:sp>
       <p:sp>
         <p:nvSpPr>
-          <p:cNvPr id="4" name="Shape 2"/>
+          <p:cNvPr id="5" name="Shape 2"/>
           <p:cNvSpPr/>
           <p:nvPr/>
         </p:nvSpPr>
@@ -6312,7 +6384,7 @@
       </p:sp>
       <p:pic>
         <p:nvPicPr>
-          <p:cNvPr id="5" name="Image 0" descr="preencoded.png">    </p:cNvPr>
+          <p:cNvPr id="6" name="Image 0" descr="preencoded.png">    </p:cNvPr>
           <p:cNvPicPr>
             <a:picLocks noChangeAspect="1"/>
           </p:cNvPicPr>
@@ -6336,7 +6408,7 @@
       </p:pic>
       <p:sp>
         <p:nvSpPr>
-          <p:cNvPr id="6" name="Text 3"/>
+          <p:cNvPr id="7" name="Text 3"/>
           <p:cNvSpPr txBox="1"/>
           <p:nvPr/>
         </p:nvSpPr>
@@ -6372,7 +6444,7 @@
       </p:sp>
       <p:sp>
         <p:nvSpPr>
-          <p:cNvPr id="7" name="Text 4"/>
+          <p:cNvPr id="8" name="Text 4"/>
           <p:cNvSpPr txBox="1"/>
           <p:nvPr/>
         </p:nvSpPr>
@@ -6466,7 +6538,7 @@
       </p:sp>
       <p:sp>
         <p:nvSpPr>
-          <p:cNvPr id="8" name="Shape 5"/>
+          <p:cNvPr id="9" name="Shape 5"/>
           <p:cNvSpPr/>
           <p:nvPr/>
         </p:nvSpPr>
@@ -6493,7 +6565,7 @@
       </p:sp>
       <p:sp>
         <p:nvSpPr>
-          <p:cNvPr id="9" name="Shape 6"/>
+          <p:cNvPr id="10" name="Shape 6"/>
           <p:cNvSpPr/>
           <p:nvPr/>
         </p:nvSpPr>
@@ -6518,7 +6590,7 @@
       </p:sp>
       <p:pic>
         <p:nvPicPr>
-          <p:cNvPr id="10" name="Image 1" descr="preencoded.png">    </p:cNvPr>
+          <p:cNvPr id="11" name="Image 1" descr="preencoded.png">    </p:cNvPr>
           <p:cNvPicPr>
             <a:picLocks noChangeAspect="1"/>
           </p:cNvPicPr>
@@ -6542,7 +6614,7 @@
       </p:pic>
       <p:sp>
         <p:nvSpPr>
-          <p:cNvPr id="11" name="Text 7"/>
+          <p:cNvPr id="12" name="Text 7"/>
           <p:cNvSpPr txBox="1"/>
           <p:nvPr/>
         </p:nvSpPr>
@@ -6578,7 +6650,7 @@
       </p:sp>
       <p:sp>
         <p:nvSpPr>
-          <p:cNvPr id="12" name="Text 8"/>
+          <p:cNvPr id="13" name="Text 8"/>
           <p:cNvSpPr txBox="1"/>
           <p:nvPr/>
         </p:nvSpPr>
@@ -6672,7 +6744,7 @@
       </p:sp>
       <p:sp>
         <p:nvSpPr>
-          <p:cNvPr id="13" name="Shape 9"/>
+          <p:cNvPr id="14" name="Shape 9"/>
           <p:cNvSpPr/>
           <p:nvPr/>
         </p:nvSpPr>
@@ -6699,7 +6771,7 @@
       </p:sp>
       <p:sp>
         <p:nvSpPr>
-          <p:cNvPr id="14" name="Shape 10"/>
+          <p:cNvPr id="15" name="Shape 10"/>
           <p:cNvSpPr/>
           <p:nvPr/>
         </p:nvSpPr>
@@ -6724,7 +6796,7 @@
       </p:sp>
       <p:pic>
         <p:nvPicPr>
-          <p:cNvPr id="15" name="Image 2" descr="preencoded.png">    </p:cNvPr>
+          <p:cNvPr id="16" name="Image 2" descr="preencoded.png">    </p:cNvPr>
           <p:cNvPicPr>
             <a:picLocks noChangeAspect="1"/>
           </p:cNvPicPr>
@@ -6748,7 +6820,7 @@
       </p:pic>
       <p:sp>
         <p:nvSpPr>
-          <p:cNvPr id="16" name="Text 11"/>
+          <p:cNvPr id="17" name="Text 11"/>
           <p:cNvSpPr txBox="1"/>
           <p:nvPr/>
         </p:nvSpPr>
@@ -6784,7 +6856,7 @@
       </p:sp>
       <p:sp>
         <p:nvSpPr>
-          <p:cNvPr id="17" name="Text 12"/>
+          <p:cNvPr id="18" name="Text 12"/>
           <p:cNvSpPr txBox="1"/>
           <p:nvPr/>
         </p:nvSpPr>
@@ -6878,7 +6950,7 @@
       </p:sp>
       <p:sp>
         <p:nvSpPr>
-          <p:cNvPr id="18" name="Shape 13"/>
+          <p:cNvPr id="19" name="Shape 13"/>
           <p:cNvSpPr/>
           <p:nvPr/>
         </p:nvSpPr>
@@ -6905,7 +6977,7 @@
       </p:sp>
       <p:sp>
         <p:nvSpPr>
-          <p:cNvPr id="19" name="Shape 14"/>
+          <p:cNvPr id="20" name="Shape 14"/>
           <p:cNvSpPr/>
           <p:nvPr/>
         </p:nvSpPr>
@@ -6930,7 +7002,7 @@
       </p:sp>
       <p:pic>
         <p:nvPicPr>
-          <p:cNvPr id="20" name="Image 3" descr="preencoded.png">    </p:cNvPr>
+          <p:cNvPr id="21" name="Image 3" descr="preencoded.png">    </p:cNvPr>
           <p:cNvPicPr>
             <a:picLocks noChangeAspect="1"/>
           </p:cNvPicPr>
@@ -6954,7 +7026,7 @@
       </p:pic>
       <p:sp>
         <p:nvSpPr>
-          <p:cNvPr id="21" name="Text 15"/>
+          <p:cNvPr id="22" name="Text 15"/>
           <p:cNvSpPr txBox="1"/>
           <p:nvPr/>
         </p:nvSpPr>
@@ -7158,7 +7230,7 @@
       </p:sp>
       <p:sp>
         <p:nvSpPr>
-          <p:cNvPr id="5" name="Text 0"/>
+          <p:cNvPr id="6" name="Text 0"/>
           <p:cNvSpPr/>
           <p:nvPr>
             <p:ph idx="101" type="body" hasCustomPrompt="1"/>
@@ -7196,7 +7268,7 @@
       </p:sp>
       <p:sp>
         <p:nvSpPr>
-          <p:cNvPr id="6" name="Shape 3"/>
+          <p:cNvPr id="7" name="Shape 3"/>
           <p:cNvSpPr/>
           <p:nvPr/>
         </p:nvSpPr>
@@ -7223,7 +7295,7 @@
       </p:sp>
       <p:sp>
         <p:nvSpPr>
-          <p:cNvPr id="7" name="Text 4"/>
+          <p:cNvPr id="8" name="Text 4"/>
           <p:cNvSpPr txBox="1"/>
           <p:nvPr/>
         </p:nvSpPr>
@@ -7259,7 +7331,7 @@
       </p:sp>
       <p:sp>
         <p:nvSpPr>
-          <p:cNvPr id="8" name="Shape 5"/>
+          <p:cNvPr id="9" name="Shape 5"/>
           <p:cNvSpPr/>
           <p:nvPr/>
         </p:nvSpPr>
@@ -7286,7 +7358,7 @@
       </p:sp>
       <p:sp>
         <p:nvSpPr>
-          <p:cNvPr id="9" name="Text 6"/>
+          <p:cNvPr id="10" name="Text 6"/>
           <p:cNvSpPr txBox="1"/>
           <p:nvPr/>
         </p:nvSpPr>
@@ -7322,7 +7394,7 @@
       </p:sp>
       <p:sp>
         <p:nvSpPr>
-          <p:cNvPr id="10" name="Shape 7"/>
+          <p:cNvPr id="11" name="Shape 7"/>
           <p:cNvSpPr/>
           <p:nvPr/>
         </p:nvSpPr>
@@ -7349,7 +7421,7 @@
       </p:sp>
       <p:sp>
         <p:nvSpPr>
-          <p:cNvPr id="11" name="Text 8"/>
+          <p:cNvPr id="12" name="Text 8"/>
           <p:cNvSpPr txBox="1"/>
           <p:nvPr/>
         </p:nvSpPr>
@@ -7385,7 +7457,7 @@
       </p:sp>
       <p:sp>
         <p:nvSpPr>
-          <p:cNvPr id="12" name="Shape 9"/>
+          <p:cNvPr id="13" name="Shape 9"/>
           <p:cNvSpPr/>
           <p:nvPr/>
         </p:nvSpPr>
@@ -7412,7 +7484,7 @@
       </p:sp>
       <p:sp>
         <p:nvSpPr>
-          <p:cNvPr id="13" name="Text 10"/>
+          <p:cNvPr id="14" name="Text 10"/>
           <p:cNvSpPr txBox="1"/>
           <p:nvPr/>
         </p:nvSpPr>
@@ -7448,7 +7520,7 @@
       </p:sp>
       <p:sp>
         <p:nvSpPr>
-          <p:cNvPr id="14" name="Text 11"/>
+          <p:cNvPr id="15" name="Text 11"/>
           <p:cNvSpPr txBox="1"/>
           <p:nvPr/>
         </p:nvSpPr>
@@ -7547,7 +7619,7 @@
       </p:sp>
       <p:sp>
         <p:nvSpPr>
-          <p:cNvPr id="3" name="Text 1"/>
+          <p:cNvPr id="4" name="Text 1"/>
           <p:cNvSpPr txBox="1"/>
           <p:nvPr/>
         </p:nvSpPr>
@@ -7583,7 +7655,7 @@
       </p:sp>
       <p:sp>
         <p:nvSpPr>
-          <p:cNvPr id="4" name="Shape 2"/>
+          <p:cNvPr id="5" name="Shape 2"/>
           <p:cNvSpPr/>
           <p:nvPr/>
         </p:nvSpPr>
@@ -7610,7 +7682,7 @@
       </p:sp>
       <p:sp>
         <p:nvSpPr>
-          <p:cNvPr id="5" name="Shape 3"/>
+          <p:cNvPr id="6" name="Shape 3"/>
           <p:cNvSpPr/>
           <p:nvPr/>
         </p:nvSpPr>
@@ -7635,7 +7707,7 @@
       </p:sp>
       <p:pic>
         <p:nvPicPr>
-          <p:cNvPr id="6" name="Image 0" descr="preencoded.png">    </p:cNvPr>
+          <p:cNvPr id="7" name="Image 0" descr="preencoded.png">    </p:cNvPr>
           <p:cNvPicPr>
             <a:picLocks noChangeAspect="1"/>
           </p:cNvPicPr>
@@ -7659,7 +7731,7 @@
       </p:pic>
       <p:sp>
         <p:nvSpPr>
-          <p:cNvPr id="7" name="Shape 4"/>
+          <p:cNvPr id="8" name="Shape 4"/>
           <p:cNvSpPr/>
           <p:nvPr/>
         </p:nvSpPr>
@@ -7686,7 +7758,7 @@
       </p:sp>
       <p:sp>
         <p:nvSpPr>
-          <p:cNvPr id="8" name="Text 5"/>
+          <p:cNvPr id="9" name="Text 5"/>
           <p:cNvSpPr txBox="1"/>
           <p:nvPr/>
         </p:nvSpPr>
@@ -7722,7 +7794,7 @@
       </p:sp>
       <p:sp>
         <p:nvSpPr>
-          <p:cNvPr id="9" name="Text 6"/>
+          <p:cNvPr id="10" name="Text 6"/>
           <p:cNvSpPr txBox="1"/>
           <p:nvPr/>
         </p:nvSpPr>
@@ -7758,7 +7830,7 @@
       </p:sp>
       <p:sp>
         <p:nvSpPr>
-          <p:cNvPr id="10" name="Text 7"/>
+          <p:cNvPr id="11" name="Text 7"/>
           <p:cNvSpPr txBox="1"/>
           <p:nvPr/>
         </p:nvSpPr>
@@ -7852,7 +7924,7 @@
       </p:sp>
       <p:sp>
         <p:nvSpPr>
-          <p:cNvPr id="11" name="Shape 8"/>
+          <p:cNvPr id="12" name="Shape 8"/>
           <p:cNvSpPr/>
           <p:nvPr/>
         </p:nvSpPr>
@@ -7879,7 +7951,7 @@
       </p:sp>
       <p:sp>
         <p:nvSpPr>
-          <p:cNvPr id="12" name="Shape 9"/>
+          <p:cNvPr id="13" name="Shape 9"/>
           <p:cNvSpPr/>
           <p:nvPr/>
         </p:nvSpPr>
@@ -7904,7 +7976,7 @@
       </p:sp>
       <p:pic>
         <p:nvPicPr>
-          <p:cNvPr id="13" name="Image 1" descr="preencoded.png">    </p:cNvPr>
+          <p:cNvPr id="14" name="Image 1" descr="preencoded.png">    </p:cNvPr>
           <p:cNvPicPr>
             <a:picLocks noChangeAspect="1"/>
           </p:cNvPicPr>
@@ -7928,7 +8000,7 @@
       </p:pic>
       <p:sp>
         <p:nvSpPr>
-          <p:cNvPr id="14" name="Shape 10"/>
+          <p:cNvPr id="15" name="Shape 10"/>
           <p:cNvSpPr/>
           <p:nvPr/>
         </p:nvSpPr>
@@ -7955,7 +8027,7 @@
       </p:sp>
       <p:sp>
         <p:nvSpPr>
-          <p:cNvPr id="15" name="Text 11"/>
+          <p:cNvPr id="16" name="Text 11"/>
           <p:cNvSpPr txBox="1"/>
           <p:nvPr/>
         </p:nvSpPr>
@@ -7991,7 +8063,7 @@
       </p:sp>
       <p:sp>
         <p:nvSpPr>
-          <p:cNvPr id="16" name="Text 12"/>
+          <p:cNvPr id="17" name="Text 12"/>
           <p:cNvSpPr txBox="1"/>
           <p:nvPr/>
         </p:nvSpPr>
@@ -8027,7 +8099,7 @@
       </p:sp>
       <p:sp>
         <p:nvSpPr>
-          <p:cNvPr id="17" name="Text 13"/>
+          <p:cNvPr id="18" name="Text 13"/>
           <p:cNvSpPr txBox="1"/>
           <p:nvPr/>
         </p:nvSpPr>
@@ -8229,7 +8301,7 @@
       </p:sp>
       <p:sp>
         <p:nvSpPr>
-          <p:cNvPr id="3" name="Shape 1"/>
+          <p:cNvPr id="4" name="Shape 1"/>
           <p:cNvSpPr/>
           <p:nvPr/>
         </p:nvSpPr>
@@ -8254,7 +8326,7 @@
       </p:sp>
       <p:sp>
         <p:nvSpPr>
-          <p:cNvPr id="4" name="Text 2"/>
+          <p:cNvPr id="5" name="Text 2"/>
           <p:cNvSpPr txBox="1"/>
           <p:nvPr/>
         </p:nvSpPr>
@@ -8290,7 +8362,7 @@
       </p:sp>
       <p:sp>
         <p:nvSpPr>
-          <p:cNvPr id="5" name="Shape 3"/>
+          <p:cNvPr id="6" name="Shape 3"/>
           <p:cNvSpPr/>
           <p:nvPr/>
         </p:nvSpPr>
@@ -8315,7 +8387,7 @@
       </p:sp>
       <p:sp>
         <p:nvSpPr>
-          <p:cNvPr id="6" name="Text 4"/>
+          <p:cNvPr id="7" name="Text 4"/>
           <p:cNvSpPr txBox="1"/>
           <p:nvPr/>
         </p:nvSpPr>
@@ -8351,7 +8423,7 @@
       </p:sp>
       <p:sp>
         <p:nvSpPr>
-          <p:cNvPr id="7" name="Shape 5"/>
+          <p:cNvPr id="8" name="Shape 5"/>
           <p:cNvSpPr/>
           <p:nvPr/>
         </p:nvSpPr>
@@ -8378,7 +8450,7 @@
       </p:sp>
       <p:sp>
         <p:nvSpPr>
-          <p:cNvPr id="8" name="Text 6"/>
+          <p:cNvPr id="9" name="Text 6"/>
           <p:cNvSpPr txBox="1"/>
           <p:nvPr/>
         </p:nvSpPr>
@@ -8428,7 +8500,7 @@
       </p:sp>
       <p:sp>
         <p:nvSpPr>
-          <p:cNvPr id="9" name="Shape 7"/>
+          <p:cNvPr id="10" name="Shape 7"/>
           <p:cNvSpPr/>
           <p:nvPr/>
         </p:nvSpPr>
@@ -8453,7 +8525,7 @@
       </p:sp>
       <p:sp>
         <p:nvSpPr>
-          <p:cNvPr id="10" name="Text 8"/>
+          <p:cNvPr id="11" name="Text 8"/>
           <p:cNvSpPr txBox="1"/>
           <p:nvPr/>
         </p:nvSpPr>
@@ -8489,7 +8561,7 @@
       </p:sp>
       <p:sp>
         <p:nvSpPr>
-          <p:cNvPr id="11" name="Shape 9"/>
+          <p:cNvPr id="12" name="Shape 9"/>
           <p:cNvSpPr/>
           <p:nvPr/>
         </p:nvSpPr>
@@ -8514,7 +8586,7 @@
       </p:sp>
       <p:sp>
         <p:nvSpPr>
-          <p:cNvPr id="12" name="Text 10"/>
+          <p:cNvPr id="13" name="Text 10"/>
           <p:cNvSpPr txBox="1"/>
           <p:nvPr/>
         </p:nvSpPr>
@@ -8550,7 +8622,7 @@
       </p:sp>
       <p:sp>
         <p:nvSpPr>
-          <p:cNvPr id="13" name="Shape 11"/>
+          <p:cNvPr id="14" name="Shape 11"/>
           <p:cNvSpPr/>
           <p:nvPr/>
         </p:nvSpPr>
@@ -8577,7 +8649,7 @@
       </p:sp>
       <p:sp>
         <p:nvSpPr>
-          <p:cNvPr id="14" name="Text 12"/>
+          <p:cNvPr id="15" name="Text 12"/>
           <p:cNvSpPr txBox="1"/>
           <p:nvPr/>
         </p:nvSpPr>
@@ -8627,7 +8699,7 @@
       </p:sp>
       <p:sp>
         <p:nvSpPr>
-          <p:cNvPr id="15" name="Shape 13"/>
+          <p:cNvPr id="16" name="Shape 13"/>
           <p:cNvSpPr/>
           <p:nvPr/>
         </p:nvSpPr>
@@ -8652,7 +8724,7 @@
       </p:sp>
       <p:sp>
         <p:nvSpPr>
-          <p:cNvPr id="16" name="Text 14"/>
+          <p:cNvPr id="17" name="Text 14"/>
           <p:cNvSpPr txBox="1"/>
           <p:nvPr/>
         </p:nvSpPr>
@@ -8688,7 +8760,7 @@
       </p:sp>
       <p:sp>
         <p:nvSpPr>
-          <p:cNvPr id="17" name="Shape 15"/>
+          <p:cNvPr id="18" name="Shape 15"/>
           <p:cNvSpPr/>
           <p:nvPr/>
         </p:nvSpPr>
@@ -8713,7 +8785,7 @@
       </p:sp>
       <p:sp>
         <p:nvSpPr>
-          <p:cNvPr id="18" name="Text 16"/>
+          <p:cNvPr id="19" name="Text 16"/>
           <p:cNvSpPr txBox="1"/>
           <p:nvPr/>
         </p:nvSpPr>
@@ -8749,7 +8821,7 @@
       </p:sp>
       <p:sp>
         <p:nvSpPr>
-          <p:cNvPr id="19" name="Shape 17"/>
+          <p:cNvPr id="20" name="Shape 17"/>
           <p:cNvSpPr/>
           <p:nvPr/>
         </p:nvSpPr>
@@ -8776,7 +8848,7 @@
       </p:sp>
       <p:sp>
         <p:nvSpPr>
-          <p:cNvPr id="20" name="Text 18"/>
+          <p:cNvPr id="21" name="Text 18"/>
           <p:cNvSpPr txBox="1"/>
           <p:nvPr/>
         </p:nvSpPr>
@@ -8826,7 +8898,7 @@
       </p:sp>
       <p:sp>
         <p:nvSpPr>
-          <p:cNvPr id="21" name="Shape 19"/>
+          <p:cNvPr id="22" name="Shape 19"/>
           <p:cNvSpPr/>
           <p:nvPr/>
         </p:nvSpPr>
@@ -8851,7 +8923,7 @@
       </p:sp>
       <p:sp>
         <p:nvSpPr>
-          <p:cNvPr id="22" name="Text 20"/>
+          <p:cNvPr id="23" name="Text 20"/>
           <p:cNvSpPr txBox="1"/>
           <p:nvPr/>
         </p:nvSpPr>
@@ -8887,7 +8959,7 @@
       </p:sp>
       <p:sp>
         <p:nvSpPr>
-          <p:cNvPr id="23" name="Shape 21"/>
+          <p:cNvPr id="24" name="Shape 21"/>
           <p:cNvSpPr/>
           <p:nvPr/>
         </p:nvSpPr>
@@ -8912,7 +8984,7 @@
       </p:sp>
       <p:sp>
         <p:nvSpPr>
-          <p:cNvPr id="24" name="Text 22"/>
+          <p:cNvPr id="25" name="Text 22"/>
           <p:cNvSpPr txBox="1"/>
           <p:nvPr/>
         </p:nvSpPr>
@@ -8948,7 +9020,7 @@
       </p:sp>
       <p:sp>
         <p:nvSpPr>
-          <p:cNvPr id="25" name="Shape 23"/>
+          <p:cNvPr id="26" name="Shape 23"/>
           <p:cNvSpPr/>
           <p:nvPr/>
         </p:nvSpPr>
@@ -8975,7 +9047,7 @@
       </p:sp>
       <p:sp>
         <p:nvSpPr>
-          <p:cNvPr id="26" name="Text 24"/>
+          <p:cNvPr id="27" name="Text 24"/>
           <p:cNvSpPr txBox="1"/>
           <p:nvPr/>
         </p:nvSpPr>
@@ -9025,7 +9097,7 @@
       </p:sp>
       <p:sp>
         <p:nvSpPr>
-          <p:cNvPr id="27" name="Shape 25"/>
+          <p:cNvPr id="28" name="Shape 25"/>
           <p:cNvSpPr/>
           <p:nvPr/>
         </p:nvSpPr>
@@ -9050,7 +9122,7 @@
       </p:sp>
       <p:sp>
         <p:nvSpPr>
-          <p:cNvPr id="28" name="Text 26"/>
+          <p:cNvPr id="29" name="Text 26"/>
           <p:cNvSpPr txBox="1"/>
           <p:nvPr/>
         </p:nvSpPr>
@@ -9086,7 +9158,7 @@
       </p:sp>
       <p:sp>
         <p:nvSpPr>
-          <p:cNvPr id="29" name="Text 27"/>
+          <p:cNvPr id="30" name="Text 27"/>
           <p:cNvSpPr txBox="1"/>
           <p:nvPr/>
         </p:nvSpPr>
@@ -9122,7 +9194,7 @@
       </p:sp>
       <p:sp>
         <p:nvSpPr>
-          <p:cNvPr id="30" name="Shape 28"/>
+          <p:cNvPr id="31" name="Shape 28"/>
           <p:cNvSpPr/>
           <p:nvPr/>
         </p:nvSpPr>
@@ -9149,7 +9221,7 @@
       </p:sp>
       <p:sp>
         <p:nvSpPr>
-          <p:cNvPr id="31" name="Text 29"/>
+          <p:cNvPr id="32" name="Text 29"/>
           <p:cNvSpPr txBox="1"/>
           <p:nvPr/>
         </p:nvSpPr>
@@ -9199,7 +9271,7 @@
       </p:sp>
       <p:sp>
         <p:nvSpPr>
-          <p:cNvPr id="32" name="Shape 30"/>
+          <p:cNvPr id="33" name="Shape 30"/>
           <p:cNvSpPr/>
           <p:nvPr/>
         </p:nvSpPr>
@@ -9226,7 +9298,7 @@
       </p:sp>
       <p:sp>
         <p:nvSpPr>
-          <p:cNvPr id="33" name="Text 31"/>
+          <p:cNvPr id="34" name="Text 31"/>
           <p:cNvSpPr txBox="1"/>
           <p:nvPr/>
         </p:nvSpPr>
@@ -11177,7 +11249,7 @@
       </p:sp>
       <p:sp>
         <p:nvSpPr>
-          <p:cNvPr id="3" name="Text 1"/>
+          <p:cNvPr id="4" name="Text 1"/>
           <p:cNvSpPr txBox="1"/>
           <p:nvPr/>
         </p:nvSpPr>
@@ -12947,7 +13019,7 @@
       </p:sp>
       <p:sp>
         <p:nvSpPr>
-          <p:cNvPr id="3" name="Shape 1"/>
+          <p:cNvPr id="4" name="Shape 1"/>
           <p:cNvSpPr/>
           <p:nvPr/>
         </p:nvSpPr>
@@ -12974,7 +13046,7 @@
       </p:sp>
       <p:sp>
         <p:nvSpPr>
-          <p:cNvPr id="4" name="Text 2"/>
+          <p:cNvPr id="5" name="Text 2"/>
           <p:cNvSpPr txBox="1"/>
           <p:nvPr/>
         </p:nvSpPr>
@@ -13010,7 +13082,7 @@
       </p:sp>
       <p:pic>
         <p:nvPicPr>
-          <p:cNvPr id="5" name="Image 0" descr="/home/user/esp32/iot-mood-lamp/docs/images/wiring_v1_neopixel.png">    </p:cNvPr>
+          <p:cNvPr id="6" name="Image 0" descr="/home/user/esp32/iot-mood-lamp/docs/images/wiring_v1_neopixel.png">    </p:cNvPr>
           <p:cNvPicPr>
             <a:picLocks noChangeAspect="1"/>
           </p:cNvPicPr>
@@ -13034,7 +13106,7 @@
       </p:pic>
       <p:sp>
         <p:nvSpPr>
-          <p:cNvPr id="6" name="Text 3"/>
+          <p:cNvPr id="7" name="Text 3"/>
           <p:cNvSpPr txBox="1"/>
           <p:nvPr/>
         </p:nvSpPr>
@@ -13146,7 +13218,7 @@
       </p:sp>
       <p:sp>
         <p:nvSpPr>
-          <p:cNvPr id="7" name="Shape 4"/>
+          <p:cNvPr id="8" name="Shape 4"/>
           <p:cNvSpPr/>
           <p:nvPr/>
         </p:nvSpPr>
@@ -13173,7 +13245,7 @@
       </p:sp>
       <p:pic>
         <p:nvPicPr>
-          <p:cNvPr id="8" name="Image 1" descr="preencoded.png">    </p:cNvPr>
+          <p:cNvPr id="9" name="Image 1" descr="preencoded.png">    </p:cNvPr>
           <p:cNvPicPr>
             <a:picLocks noChangeAspect="1"/>
           </p:cNvPicPr>
@@ -13197,7 +13269,7 @@
       </p:pic>
       <p:sp>
         <p:nvSpPr>
-          <p:cNvPr id="9" name="Text 5"/>
+          <p:cNvPr id="10" name="Text 5"/>
           <p:cNvSpPr txBox="1"/>
           <p:nvPr/>
         </p:nvSpPr>
@@ -13355,7 +13427,7 @@
       </p:sp>
       <p:sp>
         <p:nvSpPr>
-          <p:cNvPr id="3" name="Shape 1"/>
+          <p:cNvPr id="4" name="Shape 1"/>
           <p:cNvSpPr/>
           <p:nvPr/>
         </p:nvSpPr>
@@ -13382,7 +13454,7 @@
       </p:sp>
       <p:sp>
         <p:nvSpPr>
-          <p:cNvPr id="4" name="Text 2"/>
+          <p:cNvPr id="5" name="Text 2"/>
           <p:cNvSpPr txBox="1"/>
           <p:nvPr/>
         </p:nvSpPr>
@@ -13418,7 +13490,7 @@
       </p:sp>
       <p:pic>
         <p:nvPicPr>
-          <p:cNvPr id="5" name="Image 0" descr="/home/user/esp32/iot-mood-lamp/docs/images/wiring_v2_relay.png">    </p:cNvPr>
+          <p:cNvPr id="6" name="Image 0" descr="/home/user/esp32/iot-mood-lamp/docs/images/wiring_v2_relay.png">    </p:cNvPr>
           <p:cNvPicPr>
             <a:picLocks noChangeAspect="1"/>
           </p:cNvPicPr>
@@ -13442,7 +13514,7 @@
       </p:pic>
       <p:sp>
         <p:nvSpPr>
-          <p:cNvPr id="6" name="Text 3"/>
+          <p:cNvPr id="7" name="Text 3"/>
           <p:cNvSpPr txBox="1"/>
           <p:nvPr/>
         </p:nvSpPr>
@@ -13585,7 +13657,7 @@
       </p:sp>
       <p:sp>
         <p:nvSpPr>
-          <p:cNvPr id="7" name="Shape 4"/>
+          <p:cNvPr id="8" name="Shape 4"/>
           <p:cNvSpPr/>
           <p:nvPr/>
         </p:nvSpPr>
@@ -13612,7 +13684,7 @@
       </p:sp>
       <p:pic>
         <p:nvPicPr>
-          <p:cNvPr id="8" name="Image 1" descr="preencoded.png">    </p:cNvPr>
+          <p:cNvPr id="9" name="Image 1" descr="preencoded.png">    </p:cNvPr>
           <p:cNvPicPr>
             <a:picLocks noChangeAspect="1"/>
           </p:cNvPicPr>
@@ -13636,7 +13708,7 @@
       </p:pic>
       <p:sp>
         <p:nvSpPr>
-          <p:cNvPr id="9" name="Text 5"/>
+          <p:cNvPr id="10" name="Text 5"/>
           <p:cNvSpPr txBox="1"/>
           <p:nvPr/>
         </p:nvSpPr>
@@ -13794,7 +13866,7 @@
       </p:sp>
       <p:sp>
         <p:nvSpPr>
-          <p:cNvPr id="3" name="Shape 1"/>
+          <p:cNvPr id="4" name="Shape 1"/>
           <p:cNvSpPr/>
           <p:nvPr/>
         </p:nvSpPr>
@@ -13821,7 +13893,7 @@
       </p:sp>
       <p:sp>
         <p:nvSpPr>
-          <p:cNvPr id="4" name="Text 2"/>
+          <p:cNvPr id="5" name="Text 2"/>
           <p:cNvSpPr txBox="1"/>
           <p:nvPr/>
         </p:nvSpPr>
@@ -13894,7 +13966,7 @@
       </p:sp>
       <p:sp>
         <p:nvSpPr>
-          <p:cNvPr id="5" name="Text 3"/>
+          <p:cNvPr id="6" name="Text 3"/>
           <p:cNvSpPr txBox="1"/>
           <p:nvPr/>
         </p:nvSpPr>
@@ -13930,7 +14002,7 @@
       </p:sp>
       <p:sp>
         <p:nvSpPr>
-          <p:cNvPr id="6" name="Text 4"/>
+          <p:cNvPr id="7" name="Text 4"/>
           <p:cNvSpPr txBox="1"/>
           <p:nvPr/>
         </p:nvSpPr>
@@ -14468,7 +14540,7 @@
       </p:graphicFrame>
       <p:sp>
         <p:nvSpPr>
-          <p:cNvPr id="8" name="Shape 5"/>
+          <p:cNvPr id="9" name="Shape 5"/>
           <p:cNvSpPr/>
           <p:nvPr/>
         </p:nvSpPr>
@@ -14493,7 +14565,7 @@
       </p:sp>
       <p:pic>
         <p:nvPicPr>
-          <p:cNvPr id="9" name="Image 0" descr="preencoded.png">    </p:cNvPr>
+          <p:cNvPr id="10" name="Image 0" descr="preencoded.png">    </p:cNvPr>
           <p:cNvPicPr>
             <a:picLocks noChangeAspect="1"/>
           </p:cNvPicPr>
@@ -14517,7 +14589,7 @@
       </p:pic>
       <p:sp>
         <p:nvSpPr>
-          <p:cNvPr id="10" name="Text 6"/>
+          <p:cNvPr id="11" name="Text 6"/>
           <p:cNvSpPr txBox="1"/>
           <p:nvPr/>
         </p:nvSpPr>
@@ -14553,7 +14625,7 @@
       </p:sp>
       <p:sp>
         <p:nvSpPr>
-          <p:cNvPr id="11" name="Text 7"/>
+          <p:cNvPr id="12" name="Text 7"/>
           <p:cNvSpPr txBox="1"/>
           <p:nvPr/>
         </p:nvSpPr>
@@ -14589,7 +14661,7 @@
       </p:sp>
       <p:sp>
         <p:nvSpPr>
-          <p:cNvPr id="12" name="Shape 8"/>
+          <p:cNvPr id="13" name="Shape 8"/>
           <p:cNvSpPr/>
           <p:nvPr/>
         </p:nvSpPr>
@@ -14614,7 +14686,7 @@
       </p:sp>
       <p:pic>
         <p:nvPicPr>
-          <p:cNvPr id="13" name="Image 1" descr="preencoded.png">    </p:cNvPr>
+          <p:cNvPr id="14" name="Image 1" descr="preencoded.png">    </p:cNvPr>
           <p:cNvPicPr>
             <a:picLocks noChangeAspect="1"/>
           </p:cNvPicPr>
@@ -14638,7 +14710,7 @@
       </p:pic>
       <p:sp>
         <p:nvSpPr>
-          <p:cNvPr id="14" name="Text 9"/>
+          <p:cNvPr id="15" name="Text 9"/>
           <p:cNvSpPr txBox="1"/>
           <p:nvPr/>
         </p:nvSpPr>
@@ -14674,7 +14746,7 @@
       </p:sp>
       <p:sp>
         <p:nvSpPr>
-          <p:cNvPr id="15" name="Text 10"/>
+          <p:cNvPr id="16" name="Text 10"/>
           <p:cNvSpPr txBox="1"/>
           <p:nvPr/>
         </p:nvSpPr>
@@ -14710,7 +14782,7 @@
       </p:sp>
       <p:sp>
         <p:nvSpPr>
-          <p:cNvPr id="16" name="Shape 11"/>
+          <p:cNvPr id="17" name="Shape 11"/>
           <p:cNvSpPr/>
           <p:nvPr/>
         </p:nvSpPr>
@@ -14735,7 +14807,7 @@
       </p:sp>
       <p:pic>
         <p:nvPicPr>
-          <p:cNvPr id="17" name="Image 2" descr="preencoded.png">    </p:cNvPr>
+          <p:cNvPr id="18" name="Image 2" descr="preencoded.png">    </p:cNvPr>
           <p:cNvPicPr>
             <a:picLocks noChangeAspect="1"/>
           </p:cNvPicPr>
@@ -14759,7 +14831,7 @@
       </p:pic>
       <p:sp>
         <p:nvSpPr>
-          <p:cNvPr id="18" name="Text 12"/>
+          <p:cNvPr id="19" name="Text 12"/>
           <p:cNvSpPr txBox="1"/>
           <p:nvPr/>
         </p:nvSpPr>
@@ -14795,7 +14867,7 @@
       </p:sp>
       <p:sp>
         <p:nvSpPr>
-          <p:cNvPr id="19" name="Text 13"/>
+          <p:cNvPr id="20" name="Text 13"/>
           <p:cNvSpPr txBox="1"/>
           <p:nvPr/>
         </p:nvSpPr>
@@ -14939,7 +15011,7 @@
       </p:sp>
       <p:sp>
         <p:nvSpPr>
-          <p:cNvPr id="3" name="Shape 1"/>
+          <p:cNvPr id="4" name="Shape 1"/>
           <p:cNvSpPr/>
           <p:nvPr/>
         </p:nvSpPr>
@@ -14966,7 +15038,7 @@
       </p:sp>
       <p:sp>
         <p:nvSpPr>
-          <p:cNvPr id="4" name="Text 2"/>
+          <p:cNvPr id="5" name="Text 2"/>
           <p:cNvSpPr txBox="1"/>
           <p:nvPr/>
         </p:nvSpPr>
@@ -15002,7 +15074,7 @@
       </p:sp>
       <p:sp>
         <p:nvSpPr>
-          <p:cNvPr id="5" name="Shape 3"/>
+          <p:cNvPr id="6" name="Shape 3"/>
           <p:cNvSpPr/>
           <p:nvPr/>
         </p:nvSpPr>
@@ -15029,7 +15101,7 @@
       </p:sp>
       <p:sp>
         <p:nvSpPr>
-          <p:cNvPr id="6" name="Text 4"/>
+          <p:cNvPr id="7" name="Text 4"/>
           <p:cNvSpPr txBox="1"/>
           <p:nvPr/>
         </p:nvSpPr>
@@ -15136,7 +15208,7 @@
       </p:sp>
       <p:sp>
         <p:nvSpPr>
-          <p:cNvPr id="7" name="Text 5"/>
+          <p:cNvPr id="8" name="Text 5"/>
           <p:cNvSpPr txBox="1"/>
           <p:nvPr/>
         </p:nvSpPr>
@@ -15172,7 +15244,7 @@
       </p:sp>
       <p:sp>
         <p:nvSpPr>
-          <p:cNvPr id="8" name="Text 6"/>
+          <p:cNvPr id="9" name="Text 6"/>
           <p:cNvSpPr txBox="1"/>
           <p:nvPr/>
         </p:nvSpPr>
@@ -15208,7 +15280,7 @@
       </p:sp>
       <p:sp>
         <p:nvSpPr>
-          <p:cNvPr id="9" name="Text 7"/>
+          <p:cNvPr id="10" name="Text 7"/>
           <p:cNvSpPr txBox="1"/>
           <p:nvPr/>
         </p:nvSpPr>
@@ -15247,7 +15319,7 @@
       </p:sp>
       <p:sp>
         <p:nvSpPr>
-          <p:cNvPr id="10" name="Text 8"/>
+          <p:cNvPr id="11" name="Text 8"/>
           <p:cNvSpPr txBox="1"/>
           <p:nvPr/>
         </p:nvSpPr>
@@ -15283,7 +15355,7 @@
       </p:sp>
       <p:sp>
         <p:nvSpPr>
-          <p:cNvPr id="11" name="Text 9"/>
+          <p:cNvPr id="12" name="Text 9"/>
           <p:cNvSpPr txBox="1"/>
           <p:nvPr/>
         </p:nvSpPr>
@@ -15322,7 +15394,7 @@
       </p:sp>
       <p:sp>
         <p:nvSpPr>
-          <p:cNvPr id="12" name="Text 10"/>
+          <p:cNvPr id="13" name="Text 10"/>
           <p:cNvSpPr txBox="1"/>
           <p:nvPr/>
         </p:nvSpPr>
@@ -15358,7 +15430,7 @@
       </p:sp>
       <p:sp>
         <p:nvSpPr>
-          <p:cNvPr id="13" name="Text 11"/>
+          <p:cNvPr id="14" name="Text 11"/>
           <p:cNvSpPr txBox="1"/>
           <p:nvPr/>
         </p:nvSpPr>
@@ -15397,7 +15469,7 @@
       </p:sp>
       <p:sp>
         <p:nvSpPr>
-          <p:cNvPr id="14" name="Text 12"/>
+          <p:cNvPr id="15" name="Text 12"/>
           <p:cNvSpPr txBox="1"/>
           <p:nvPr/>
         </p:nvSpPr>
@@ -15433,7 +15505,7 @@
       </p:sp>
       <p:sp>
         <p:nvSpPr>
-          <p:cNvPr id="15" name="Text 13"/>
+          <p:cNvPr id="16" name="Text 13"/>
           <p:cNvSpPr txBox="1"/>
           <p:nvPr/>
         </p:nvSpPr>
@@ -15472,7 +15544,7 @@
       </p:sp>
       <p:sp>
         <p:nvSpPr>
-          <p:cNvPr id="16" name="Text 14"/>
+          <p:cNvPr id="17" name="Text 14"/>
           <p:cNvSpPr txBox="1"/>
           <p:nvPr/>
         </p:nvSpPr>
@@ -15508,7 +15580,7 @@
       </p:sp>
       <p:sp>
         <p:nvSpPr>
-          <p:cNvPr id="17" name="Text 15"/>
+          <p:cNvPr id="18" name="Text 15"/>
           <p:cNvSpPr txBox="1"/>
           <p:nvPr/>
         </p:nvSpPr>
@@ -15547,7 +15619,7 @@
       </p:sp>
       <p:sp>
         <p:nvSpPr>
-          <p:cNvPr id="18" name="Text 16"/>
+          <p:cNvPr id="19" name="Text 16"/>
           <p:cNvSpPr txBox="1"/>
           <p:nvPr/>
         </p:nvSpPr>
@@ -15583,7 +15655,7 @@
       </p:sp>
       <p:sp>
         <p:nvSpPr>
-          <p:cNvPr id="19" name="Text 17"/>
+          <p:cNvPr id="20" name="Text 17"/>
           <p:cNvSpPr txBox="1"/>
           <p:nvPr/>
         </p:nvSpPr>
@@ -15619,7 +15691,7 @@
       </p:sp>
       <p:sp>
         <p:nvSpPr>
-          <p:cNvPr id="20" name="Shape 18"/>
+          <p:cNvPr id="21" name="Shape 18"/>
           <p:cNvSpPr/>
           <p:nvPr/>
         </p:nvSpPr>
@@ -15646,7 +15718,7 @@
       </p:sp>
       <p:sp>
         <p:nvSpPr>
-          <p:cNvPr id="21" name="Text 19"/>
+          <p:cNvPr id="22" name="Text 19"/>
           <p:cNvSpPr txBox="1"/>
           <p:nvPr/>
         </p:nvSpPr>
@@ -15682,7 +15754,7 @@
       </p:sp>
       <p:sp>
         <p:nvSpPr>
-          <p:cNvPr id="22" name="Text 20"/>
+          <p:cNvPr id="23" name="Text 20"/>
           <p:cNvSpPr txBox="1"/>
           <p:nvPr/>
         </p:nvSpPr>
@@ -15718,7 +15790,7 @@
       </p:sp>
       <p:sp>
         <p:nvSpPr>
-          <p:cNvPr id="23" name="Shape 21"/>
+          <p:cNvPr id="24" name="Shape 21"/>
           <p:cNvSpPr/>
           <p:nvPr/>
         </p:nvSpPr>
@@ -15745,7 +15817,7 @@
       </p:sp>
       <p:sp>
         <p:nvSpPr>
-          <p:cNvPr id="24" name="Text 22"/>
+          <p:cNvPr id="25" name="Text 22"/>
           <p:cNvSpPr txBox="1"/>
           <p:nvPr/>
         </p:nvSpPr>
@@ -15781,7 +15853,7 @@
       </p:sp>
       <p:sp>
         <p:nvSpPr>
-          <p:cNvPr id="25" name="Text 23"/>
+          <p:cNvPr id="26" name="Text 23"/>
           <p:cNvSpPr txBox="1"/>
           <p:nvPr/>
         </p:nvSpPr>
@@ -15817,7 +15889,7 @@
       </p:sp>
       <p:sp>
         <p:nvSpPr>
-          <p:cNvPr id="26" name="Shape 24"/>
+          <p:cNvPr id="27" name="Shape 24"/>
           <p:cNvSpPr/>
           <p:nvPr/>
         </p:nvSpPr>
@@ -15844,7 +15916,7 @@
       </p:sp>
       <p:sp>
         <p:nvSpPr>
-          <p:cNvPr id="27" name="Text 25"/>
+          <p:cNvPr id="28" name="Text 25"/>
           <p:cNvSpPr txBox="1"/>
           <p:nvPr/>
         </p:nvSpPr>
@@ -15880,7 +15952,7 @@
       </p:sp>
       <p:sp>
         <p:nvSpPr>
-          <p:cNvPr id="28" name="Text 26"/>
+          <p:cNvPr id="29" name="Text 26"/>
           <p:cNvSpPr txBox="1"/>
           <p:nvPr/>
         </p:nvSpPr>
@@ -15916,7 +15988,7 @@
       </p:sp>
       <p:sp>
         <p:nvSpPr>
-          <p:cNvPr id="29" name="Shape 27"/>
+          <p:cNvPr id="30" name="Shape 27"/>
           <p:cNvSpPr/>
           <p:nvPr/>
         </p:nvSpPr>
@@ -15943,7 +16015,7 @@
       </p:sp>
       <p:sp>
         <p:nvSpPr>
-          <p:cNvPr id="30" name="Text 28"/>
+          <p:cNvPr id="31" name="Text 28"/>
           <p:cNvSpPr txBox="1"/>
           <p:nvPr/>
         </p:nvSpPr>
@@ -15979,7 +16051,7 @@
       </p:sp>
       <p:sp>
         <p:nvSpPr>
-          <p:cNvPr id="31" name="Text 29"/>
+          <p:cNvPr id="32" name="Text 29"/>
           <p:cNvSpPr txBox="1"/>
           <p:nvPr/>
         </p:nvSpPr>

--- a/iot-mood-lamp/docs/lesson_3h_student.pptx
+++ b/iot-mood-lamp/docs/lesson_3h_student.pptx
@@ -120,26 +120,26 @@
   <p:extLst>
     <p:ext uri="{521415D9-36F7-43E2-AB2F-B90AF26B5E84}">
       <p14:sectionLst xmlns:p14="http://schemas.microsoft.com/office/powerpoint/2010/main">
-        <p14:section name="시작" id="{5ea48ca7-3a5a-eb42-c883-2e18db436735}">
+        <p14:section name="시작" id="{125c6f7e-3f90-2d0e-db3d-6e28c0ab0e1b}">
           <p14:sldIdLst>
             <p14:sldId id="256"/>
           </p14:sldIdLst>
         </p14:section>
-        <p14:section name="소개" id="{4796d09a-8b74-5089-e860-d67fa1642822}">
+        <p14:section name="소개" id="{cafc5e12-192b-0b38-837a-7ad7b4095180}">
           <p14:sldIdLst>
             <p14:sldId id="257"/>
             <p14:sldId id="258"/>
             <p14:sldId id="259"/>
           </p14:sldIdLst>
         </p14:section>
-        <p14:section name="배선" id="{a47db895-9102-fccc-ad82-a9895b927a29}">
+        <p14:section name="배선" id="{8d4d01af-f6d0-f33a-6280-3077a780a1b1}">
           <p14:sldIdLst>
             <p14:sldId id="260"/>
             <p14:sldId id="261"/>
             <p14:sldId id="262"/>
           </p14:sldIdLst>
         </p14:section>
-        <p14:section name="진행" id="{bd1ead31-c3f4-0047-faba-2d79aed1c679}">
+        <p14:section name="진행" id="{74c02b44-eb3a-8f2c-52d0-56a309a0952f}">
           <p14:sldIdLst>
             <p14:sldId id="263"/>
             <p14:sldId id="264"/>
@@ -148,7 +148,7 @@
             <p14:sldId id="267"/>
           </p14:sldIdLst>
         </p14:section>
-        <p14:section name="도움" id="{0f88e225-a2a7-cfa2-a336-fb65f905dee8}">
+        <p14:section name="도움" id="{093f4f5a-5a2f-2f36-c6d1-54c501e40098}">
           <p14:sldIdLst>
             <p14:sldId id="268"/>
             <p14:sldId id="269"/>
@@ -654,7 +654,7 @@
             <a:r>
               <a:rPr lang="en-US" dirty="0"/>
               <a:t>[교사 노트] V2 릴레이 코드 배경
-- KY-019형은 HIGH 트리거 → RELAY_ACTIVE_LOW = false. LOW에서 켜지는 모듈이면 true.
+- 이번 모듈은 실측 결과 LOW에서 켜지는 종류라 RELAY_ACTIVE_LOW = true 가 기본값. HIGH에서 켜지는 모듈이면 false. 학생이 '1에서 꺼진다'고 하면 이 값을 반대로.
 - 부팅 순간 전구가 깜빡이지 않게 pinMode보다 먼저 '꺼짐' 값을 써 둔다. 리셋 버튼 테스트는 이것을 확인하는 절차.
 - 220V 없이 릴레이만 꽂고 테스트한다. '딸깍' 소리 + 모듈 LED로 충분히 확인된다.
 - 시리얼 명령: 1(켜기) · 0(끄기) · t(토글) · blink(3번). on/off도 된다.
@@ -3677,7 +3677,7 @@
                 <a:ea typeface="JetBrains Mono" pitchFamily="34" charset="-122"/>
                 <a:cs typeface="JetBrains Mono" pitchFamily="34" charset="-120"/>
               </a:rPr>
-              <a:t>const bool RELAY_ACTIVE_LOW = false; // KY-019형 = HIGH에서 켜짐</a:t>
+              <a:t>const bool RELAY_ACTIVE_LOW = true;  // 이 모듈은 LOW에서 켜짐</a:t>
             </a:r>
             <a:endParaRPr lang="en-US" sz="1100" dirty="0"/>
           </a:p>
@@ -4549,7 +4549,7 @@
                   <a:schemeClr val="tx2"/>
                 </a:solidFill>
               </a:rPr>
-              <a:t>1에서 꺼지고 0에서 켜지면 RELAY_ACTIVE_LOW = true 로 바꿔 업로드</a:t>
+              <a:t>1에서 꺼지고 0에서 켜지면 RELAY_ACTIVE_LOW 를 반대로(true↔false) 바꿔 업로드</a:t>
             </a:r>
             <a:endParaRPr lang="en-US" sz="1050" dirty="0"/>
           </a:p>

--- a/iot-mood-lamp/docs/lesson_3h_student.pptx
+++ b/iot-mood-lamp/docs/lesson_3h_student.pptx
@@ -120,26 +120,26 @@
   <p:extLst>
     <p:ext uri="{521415D9-36F7-43E2-AB2F-B90AF26B5E84}">
       <p14:sectionLst xmlns:p14="http://schemas.microsoft.com/office/powerpoint/2010/main">
-        <p14:section name="시작" id="{125c6f7e-3f90-2d0e-db3d-6e28c0ab0e1b}">
+        <p14:section name="시작" id="{5ea48ca7-3a5a-eb42-c883-2e18db436735}">
           <p14:sldIdLst>
             <p14:sldId id="256"/>
           </p14:sldIdLst>
         </p14:section>
-        <p14:section name="소개" id="{cafc5e12-192b-0b38-837a-7ad7b4095180}">
+        <p14:section name="소개" id="{4796d09a-8b74-5089-e860-d67fa1642822}">
           <p14:sldIdLst>
             <p14:sldId id="257"/>
             <p14:sldId id="258"/>
             <p14:sldId id="259"/>
           </p14:sldIdLst>
         </p14:section>
-        <p14:section name="배선" id="{8d4d01af-f6d0-f33a-6280-3077a780a1b1}">
+        <p14:section name="배선" id="{a47db895-9102-fccc-ad82-a9895b927a29}">
           <p14:sldIdLst>
             <p14:sldId id="260"/>
             <p14:sldId id="261"/>
             <p14:sldId id="262"/>
           </p14:sldIdLst>
         </p14:section>
-        <p14:section name="진행" id="{74c02b44-eb3a-8f2c-52d0-56a309a0952f}">
+        <p14:section name="진행" id="{bd1ead31-c3f4-0047-faba-2d79aed1c679}">
           <p14:sldIdLst>
             <p14:sldId id="263"/>
             <p14:sldId id="264"/>
@@ -148,7 +148,7 @@
             <p14:sldId id="267"/>
           </p14:sldIdLst>
         </p14:section>
-        <p14:section name="도움" id="{093f4f5a-5a2f-2f36-c6d1-54c501e40098}">
+        <p14:section name="도움" id="{0f88e225-a2a7-cfa2-a336-fb65f905dee8}">
           <p14:sldIdLst>
             <p14:sldId id="268"/>
             <p14:sldId id="269"/>
@@ -654,7 +654,7 @@
             <a:r>
               <a:rPr lang="en-US" dirty="0"/>
               <a:t>[교사 노트] V2 릴레이 코드 배경
-- 이번 모듈은 실측 결과 LOW에서 켜지는 종류라 RELAY_ACTIVE_LOW = true 가 기본값. HIGH에서 켜지는 모듈이면 false. 학생이 '1에서 꺼진다'고 하면 이 값을 반대로.
+- KY-019형은 HIGH 트리거 → RELAY_ACTIVE_LOW = false. LOW에서 켜지는 모듈이면 true.
 - 부팅 순간 전구가 깜빡이지 않게 pinMode보다 먼저 '꺼짐' 값을 써 둔다. 리셋 버튼 테스트는 이것을 확인하는 절차.
 - 220V 없이 릴레이만 꽂고 테스트한다. '딸깍' 소리 + 모듈 LED로 충분히 확인된다.
 - 시리얼 명령: 1(켜기) · 0(끄기) · t(토글) · blink(3번). on/off도 된다.
@@ -3677,7 +3677,7 @@
                 <a:ea typeface="JetBrains Mono" pitchFamily="34" charset="-122"/>
                 <a:cs typeface="JetBrains Mono" pitchFamily="34" charset="-120"/>
               </a:rPr>
-              <a:t>const bool RELAY_ACTIVE_LOW = true;  // 이 모듈은 LOW에서 켜짐</a:t>
+              <a:t>const bool RELAY_ACTIVE_LOW = false; // KY-019형 = HIGH에서 켜짐</a:t>
             </a:r>
             <a:endParaRPr lang="en-US" sz="1100" dirty="0"/>
           </a:p>
@@ -4549,7 +4549,7 @@
                   <a:schemeClr val="tx2"/>
                 </a:solidFill>
               </a:rPr>
-              <a:t>1에서 꺼지고 0에서 켜지면 RELAY_ACTIVE_LOW 를 반대로(true↔false) 바꿔 업로드</a:t>
+              <a:t>1에서 꺼지고 0에서 켜지면 RELAY_ACTIVE_LOW = true 로 바꿔 업로드</a:t>
             </a:r>
             <a:endParaRPr lang="en-US" sz="1050" dirty="0"/>
           </a:p>

--- a/iot-mood-lamp/docs/lesson_3h_student.pptx
+++ b/iot-mood-lamp/docs/lesson_3h_student.pptx
@@ -120,26 +120,26 @@
   <p:extLst>
     <p:ext uri="{521415D9-36F7-43E2-AB2F-B90AF26B5E84}">
       <p14:sectionLst xmlns:p14="http://schemas.microsoft.com/office/powerpoint/2010/main">
-        <p14:section name="시작" id="{5ea48ca7-3a5a-eb42-c883-2e18db436735}">
+        <p14:section name="시작" id="{20002bd8-15ca-d9ea-6590-c6dac4255c83}">
           <p14:sldIdLst>
             <p14:sldId id="256"/>
           </p14:sldIdLst>
         </p14:section>
-        <p14:section name="소개" id="{4796d09a-8b74-5089-e860-d67fa1642822}">
+        <p14:section name="소개" id="{990a3d54-b0d2-75b1-4709-cbc27be3fff5}">
           <p14:sldIdLst>
             <p14:sldId id="257"/>
             <p14:sldId id="258"/>
             <p14:sldId id="259"/>
           </p14:sldIdLst>
         </p14:section>
-        <p14:section name="배선" id="{a47db895-9102-fccc-ad82-a9895b927a29}">
+        <p14:section name="배선" id="{1c821b01-7f10-9418-5fbb-520cfbc65490}">
           <p14:sldIdLst>
             <p14:sldId id="260"/>
             <p14:sldId id="261"/>
             <p14:sldId id="262"/>
           </p14:sldIdLst>
         </p14:section>
-        <p14:section name="진행" id="{bd1ead31-c3f4-0047-faba-2d79aed1c679}">
+        <p14:section name="진행" id="{1060741d-23ae-8e78-3854-ff4af29553db}">
           <p14:sldIdLst>
             <p14:sldId id="263"/>
             <p14:sldId id="264"/>
@@ -148,7 +148,7 @@
             <p14:sldId id="267"/>
           </p14:sldIdLst>
         </p14:section>
-        <p14:section name="도움" id="{0f88e225-a2a7-cfa2-a336-fb65f905dee8}">
+        <p14:section name="도움" id="{7ea2bb2e-ebb0-ecf3-5a41-d350efb27fc1}">
           <p14:sldIdLst>
             <p14:sldId id="268"/>
             <p14:sldId id="269"/>
@@ -654,7 +654,7 @@
             <a:r>
               <a:rPr lang="en-US" dirty="0"/>
               <a:t>[교사 노트] V2 릴레이 코드 배경
-- KY-019형은 HIGH 트리거 → RELAY_ACTIVE_LOW = false. LOW에서 켜지는 모듈이면 true.
+- KY-019형은 HIGH 트리거 → RELAY_ACTIVE_LOW = false. 전구가 반대로 동작하면 거의 다 COM–NC에 꽂은 것 → NO로 옮긴다. 모듈 LED까지 반대일 때만 코드 값을 바꾼다.
 - 부팅 순간 전구가 깜빡이지 않게 pinMode보다 먼저 '꺼짐' 값을 써 둔다. 리셋 버튼 테스트는 이것을 확인하는 절차.
 - 220V 없이 릴레이만 꽂고 테스트한다. '딸깍' 소리 + 모듈 LED로 충분히 확인된다.
 - 시리얼 명령: 1(켜기) · 0(끄기) · t(토글) · blink(3번). on/off도 된다.
@@ -4513,7 +4513,7 @@
                   <a:schemeClr val="tx1"/>
                 </a:solidFill>
               </a:rPr>
-              <a:t>거꾸로 동작하면</a:t>
+              <a:t>전구가 거꾸로면</a:t>
             </a:r>
             <a:endParaRPr lang="en-US" sz="1150" dirty="0"/>
           </a:p>
@@ -4549,7 +4549,7 @@
                   <a:schemeClr val="tx2"/>
                 </a:solidFill>
               </a:rPr>
-              <a:t>1에서 꺼지고 0에서 켜지면 RELAY_ACTIVE_LOW = true 로 바꿔 업로드</a:t>
+              <a:t>모듈 LED는 맞는데 전구만 반대 → 전구 선을 NC에서 NO 단자로 (코드 아님)</a:t>
             </a:r>
             <a:endParaRPr lang="en-US" sz="1050" dirty="0"/>
           </a:p>

--- a/iot-mood-lamp/docs/lesson_3h_student.pptx
+++ b/iot-mood-lamp/docs/lesson_3h_student.pptx
@@ -120,26 +120,26 @@
   <p:extLst>
     <p:ext uri="{521415D9-36F7-43E2-AB2F-B90AF26B5E84}">
       <p14:sectionLst xmlns:p14="http://schemas.microsoft.com/office/powerpoint/2010/main">
-        <p14:section name="시작" id="{20002bd8-15ca-d9ea-6590-c6dac4255c83}">
+        <p14:section name="시작" id="{7f230c59-5625-1fad-d974-15269d8b1d95}">
           <p14:sldIdLst>
             <p14:sldId id="256"/>
           </p14:sldIdLst>
         </p14:section>
-        <p14:section name="소개" id="{990a3d54-b0d2-75b1-4709-cbc27be3fff5}">
+        <p14:section name="소개" id="{e15b05f2-cf93-82f9-9757-35a1ec5d2f4c}">
           <p14:sldIdLst>
             <p14:sldId id="257"/>
             <p14:sldId id="258"/>
             <p14:sldId id="259"/>
           </p14:sldIdLst>
         </p14:section>
-        <p14:section name="배선" id="{1c821b01-7f10-9418-5fbb-520cfbc65490}">
+        <p14:section name="배선" id="{cb186401-5489-10bb-e2fe-1493ed9e7d58}">
           <p14:sldIdLst>
             <p14:sldId id="260"/>
             <p14:sldId id="261"/>
             <p14:sldId id="262"/>
           </p14:sldIdLst>
         </p14:section>
-        <p14:section name="진행" id="{1060741d-23ae-8e78-3854-ff4af29553db}">
+        <p14:section name="진행" id="{33fe0fbe-0562-79ae-b7de-a21841c18674}">
           <p14:sldIdLst>
             <p14:sldId id="263"/>
             <p14:sldId id="264"/>
@@ -148,7 +148,7 @@
             <p14:sldId id="267"/>
           </p14:sldIdLst>
         </p14:section>
-        <p14:section name="도움" id="{7ea2bb2e-ebb0-ecf3-5a41-d350efb27fc1}">
+        <p14:section name="도움" id="{dbebe83f-ba8e-3b99-18e7-1c1bf49bbf89}">
           <p14:sldIdLst>
             <p14:sldId id="268"/>
             <p14:sldId id="269"/>
@@ -1491,7 +1491,7 @@
 - 전원: 2포트 USB 충전기 1개 — 2.4A 포트 → USB 전원선(빨강·검정) → 실드 EXT PWR, 1A 포트 → 보드 micro USB. 플러그는 1개.
 - 펌웨어는 MAX_BRIGHTNESS = 128로 네오픽셀을 약 0.5A로 묶는다. 16구는 상한 255까지 올려도 2.4A 포트 안에 들어온다.
 - SEL 점퍼를 꽂은 채 EXT PWR에 전원을 넣으면 보드 전원과 외부 전원이 합선된다. 배선 검사 때 점퍼부터 본다.
-- 업로드 중에는 PC USB만. PC USB와 충전기를 동시에 꽂지 않는다.
+- 개발 중 연결: 보드 micro USB(PC) + EXT PWR(충전기 2.4A). SEL을 뺐으면 둘 다 꽂아도 된다. PC USB만 꽂으면 실드 V 줄에 전원이 없어 네오픽셀·PIR이 안 켜진다. 보드 micro USB에 PC와 충전기를 동시에 꽂는 것만 피한다.
 - 가장 흔한 실수: DIN 방향(화살표 반대쪽 끝에 꽂음), 5V와 GND 바꿔 꽂음, 조도센서 VCC를 5V(V)에 꽂음.
 - 소켓의 전구는 빼고 램프의 220V 코드는 분리해 둔다 — 빈 소켓에 220V가 들어오는 일을 원천 차단.</a:t>
             </a:r>
@@ -7823,7 +7823,7 @@
                   <a:srgbClr val="1F1442"/>
                 </a:solidFill>
               </a:rPr>
-              <a:t>업로드 중엔 PC USB만</a:t>
+              <a:t>보드 micro USB에는 PC와 충전기 중 하나만</a:t>
             </a:r>
             <a:endParaRPr lang="en-US" sz="1200" dirty="0"/>
           </a:p>
@@ -7841,7 +7841,7 @@
                   <a:srgbClr val="1F1442"/>
                 </a:solidFill>
               </a:rPr>
-              <a:t>V1: SEL 뺌 + EXT PWR 연결</a:t>
+              <a:t>V1: SEL 뺌 + EXT PWR 꽂음 (테스트 중에도)</a:t>
             </a:r>
             <a:endParaRPr lang="en-US" sz="1200" dirty="0"/>
           </a:p>
@@ -16000,7 +16000,7 @@
                   <a:srgbClr val="9A1C12"/>
                 </a:solidFill>
               </a:rPr>
-              <a:t>네오픽셀 전원은 충전기 2.4A 포트 → EXT PWR, 보드는 1A 포트 → micro USB. 점퍼를 꽂은 채 EXT PWR에 전원을 넣으면 합선. 업로드 중엔 PC USB만.</a:t>
+              <a:t>네오픽셀·PIR 전원은 충전기 2.4A 포트 → EXT PWR (업로드·테스트 중에도 꽂아 둔다. PC USB만으로는 안 켜짐). 보드는 PC USB, 완성 후 1A 포트 → micro USB. 점퍼를 꽂은 채 EXT PWR에 전원을 넣으면 합선.</a:t>
             </a:r>
             <a:endParaRPr lang="en-US" sz="1100" dirty="0"/>
           </a:p>
